--- a/音频.pptx
+++ b/音频.pptx
@@ -2930,9 +2930,4822 @@
         <p:nvPr/>
       </p:nvGrpSpPr>
       <p:grpSpPr/>
+      <p:sp>
+        <p:nvSpPr>
+          <p:cNvPr id="4" name="圆角矩形 3"/>
+          <p:cNvSpPr/>
+          <p:nvPr/>
+        </p:nvSpPr>
+        <p:spPr>
+          <a:xfrm>
+            <a:off x="259080" y="575310"/>
+            <a:ext cx="11793855" cy="5465445"/>
+          </a:xfrm>
+          <a:prstGeom prst="roundRect">
+            <a:avLst/>
+          </a:prstGeom>
+        </p:spPr>
+        <p:style>
+          <a:lnRef idx="2">
+            <a:schemeClr val="accent1"/>
+          </a:lnRef>
+          <a:fillRef idx="0">
+            <a:srgbClr val="FFFFFF"/>
+          </a:fillRef>
+          <a:effectRef idx="0">
+            <a:srgbClr val="FFFFFF"/>
+          </a:effectRef>
+          <a:fontRef idx="minor">
+            <a:schemeClr val="tx1"/>
+          </a:fontRef>
+        </p:style>
+        <p:txBody>
+          <a:bodyPr rtlCol="0" anchor="ctr"/>
+          <a:p>
+            <a:pPr algn="ctr"/>
+            <a:endParaRPr lang="zh-CN" altLang="en-US"/>
+          </a:p>
+        </p:txBody>
+      </p:sp>
+      <p:sp>
+        <p:nvSpPr>
+          <p:cNvPr id="5" name="文本框 4"/>
+          <p:cNvSpPr txBox="1"/>
+          <p:nvPr/>
+        </p:nvSpPr>
+        <p:spPr>
+          <a:xfrm>
+            <a:off x="755650" y="923290"/>
+            <a:ext cx="2015490" cy="368300"/>
+          </a:xfrm>
+          <a:prstGeom prst="rect">
+            <a:avLst/>
+          </a:prstGeom>
+          <a:noFill/>
+        </p:spPr>
+        <p:txBody>
+          <a:bodyPr wrap="square" rtlCol="0">
+            <a:spAutoFit/>
+          </a:bodyPr>
+          <a:p>
+            <a:r>
+              <a:rPr lang="zh-CN" altLang="en-US"/>
+              <a:t>音频设置</a:t>
+            </a:r>
+            <a:endParaRPr lang="zh-CN" altLang="en-US"/>
+          </a:p>
+        </p:txBody>
+      </p:sp>
+      <p:sp>
+        <p:nvSpPr>
+          <p:cNvPr id="6" name="文本框 5"/>
+          <p:cNvSpPr txBox="1"/>
+          <p:nvPr/>
+        </p:nvSpPr>
+        <p:spPr>
+          <a:xfrm>
+            <a:off x="812800" y="1618615"/>
+            <a:ext cx="2539365" cy="368300"/>
+          </a:xfrm>
+          <a:prstGeom prst="rect">
+            <a:avLst/>
+          </a:prstGeom>
+          <a:noFill/>
+        </p:spPr>
+        <p:txBody>
+          <a:bodyPr wrap="square" rtlCol="0">
+            <a:spAutoFit/>
+          </a:bodyPr>
+          <a:p>
+            <a:r>
+              <a:rPr lang="zh-CN" altLang="en-US"/>
+              <a:t>总音量</a:t>
+            </a:r>
+            <a:endParaRPr lang="zh-CN" altLang="en-US"/>
+          </a:p>
+        </p:txBody>
+      </p:sp>
+      <p:cxnSp>
+        <p:nvCxnSpPr>
+          <p:cNvPr id="7" name="直接箭头连接符 6"/>
+          <p:cNvCxnSpPr/>
+          <p:nvPr/>
+        </p:nvCxnSpPr>
+        <p:spPr>
+          <a:xfrm>
+            <a:off x="2315845" y="1802130"/>
+            <a:ext cx="6208395" cy="10160"/>
+          </a:xfrm>
+          <a:prstGeom prst="straightConnector1">
+            <a:avLst/>
+          </a:prstGeom>
+          <a:ln>
+            <a:tailEnd type="arrow"/>
+          </a:ln>
+        </p:spPr>
+        <p:style>
+          <a:lnRef idx="2">
+            <a:schemeClr val="accent1"/>
+          </a:lnRef>
+          <a:fillRef idx="0">
+            <a:srgbClr val="FFFFFF"/>
+          </a:fillRef>
+          <a:effectRef idx="0">
+            <a:srgbClr val="FFFFFF"/>
+          </a:effectRef>
+          <a:fontRef idx="minor">
+            <a:schemeClr val="tx1"/>
+          </a:fontRef>
+        </p:style>
+      </p:cxnSp>
+      <p:sp>
+        <p:nvSpPr>
+          <p:cNvPr id="8" name="圆角矩形 7"/>
+          <p:cNvSpPr/>
+          <p:nvPr/>
+        </p:nvSpPr>
+        <p:spPr>
+          <a:xfrm>
+            <a:off x="623570" y="2605405"/>
+            <a:ext cx="1926590" cy="2743835"/>
+          </a:xfrm>
+          <a:prstGeom prst="roundRect">
+            <a:avLst/>
+          </a:prstGeom>
+        </p:spPr>
+        <p:style>
+          <a:lnRef idx="2">
+            <a:schemeClr val="accent1"/>
+          </a:lnRef>
+          <a:fillRef idx="0">
+            <a:srgbClr val="FFFFFF"/>
+          </a:fillRef>
+          <a:effectRef idx="0">
+            <a:srgbClr val="FFFFFF"/>
+          </a:effectRef>
+          <a:fontRef idx="minor">
+            <a:schemeClr val="tx1"/>
+          </a:fontRef>
+        </p:style>
+        <p:txBody>
+          <a:bodyPr rtlCol="0" anchor="ctr"/>
+          <a:p>
+            <a:pPr algn="ctr"/>
+            <a:endParaRPr lang="zh-CN" altLang="en-US"/>
+          </a:p>
+        </p:txBody>
+      </p:sp>
+      <p:sp>
+        <p:nvSpPr>
+          <p:cNvPr id="12" name="圆角矩形 11"/>
+          <p:cNvSpPr/>
+          <p:nvPr/>
+        </p:nvSpPr>
+        <p:spPr>
+          <a:xfrm>
+            <a:off x="623570" y="2605405"/>
+            <a:ext cx="1926590" cy="2743835"/>
+          </a:xfrm>
+          <a:prstGeom prst="roundRect">
+            <a:avLst/>
+          </a:prstGeom>
+        </p:spPr>
+        <p:style>
+          <a:lnRef idx="2">
+            <a:schemeClr val="accent1"/>
+          </a:lnRef>
+          <a:fillRef idx="0">
+            <a:srgbClr val="FFFFFF"/>
+          </a:fillRef>
+          <a:effectRef idx="0">
+            <a:srgbClr val="FFFFFF"/>
+          </a:effectRef>
+          <a:fontRef idx="minor">
+            <a:schemeClr val="tx1"/>
+          </a:fontRef>
+        </p:style>
+        <p:txBody>
+          <a:bodyPr rtlCol="0" anchor="ctr"/>
+          <a:p>
+            <a:pPr algn="ctr"/>
+            <a:endParaRPr lang="zh-CN" altLang="en-US"/>
+          </a:p>
+        </p:txBody>
+      </p:sp>
+      <p:sp>
+        <p:nvSpPr>
+          <p:cNvPr id="16" name="文本框 15"/>
+          <p:cNvSpPr txBox="1"/>
+          <p:nvPr/>
+        </p:nvSpPr>
+        <p:spPr>
+          <a:xfrm>
+            <a:off x="896620" y="2392045"/>
+            <a:ext cx="1386840" cy="368300"/>
+          </a:xfrm>
+          <a:prstGeom prst="rect">
+            <a:avLst/>
+          </a:prstGeom>
+          <a:noFill/>
+        </p:spPr>
+        <p:txBody>
+          <a:bodyPr wrap="square" rtlCol="0">
+            <a:spAutoFit/>
+          </a:bodyPr>
+          <a:p>
+            <a:r>
+              <a:rPr lang="zh-CN" altLang="en-US"/>
+              <a:t>背景音乐</a:t>
+            </a:r>
+            <a:endParaRPr lang="zh-CN" altLang="en-US"/>
+          </a:p>
+        </p:txBody>
+      </p:sp>
+      <p:sp>
+        <p:nvSpPr>
+          <p:cNvPr id="17" name="文本框 16"/>
+          <p:cNvSpPr txBox="1"/>
+          <p:nvPr/>
+        </p:nvSpPr>
+        <p:spPr>
+          <a:xfrm>
+            <a:off x="3136900" y="2392045"/>
+            <a:ext cx="1386840" cy="368300"/>
+          </a:xfrm>
+          <a:prstGeom prst="rect">
+            <a:avLst/>
+          </a:prstGeom>
+          <a:noFill/>
+        </p:spPr>
+        <p:txBody>
+          <a:bodyPr wrap="square" rtlCol="0">
+            <a:spAutoFit/>
+          </a:bodyPr>
+          <a:p>
+            <a:r>
+              <a:rPr lang="zh-CN" altLang="en-US"/>
+              <a:t>游戏</a:t>
+            </a:r>
+            <a:r>
+              <a:rPr lang="zh-CN" altLang="en-US"/>
+              <a:t>音乐</a:t>
+            </a:r>
+            <a:endParaRPr lang="zh-CN" altLang="en-US"/>
+          </a:p>
+        </p:txBody>
+      </p:sp>
+      <p:sp>
+        <p:nvSpPr>
+          <p:cNvPr id="18" name="文本框 17"/>
+          <p:cNvSpPr txBox="1"/>
+          <p:nvPr/>
+        </p:nvSpPr>
+        <p:spPr>
+          <a:xfrm>
+            <a:off x="5467350" y="2392045"/>
+            <a:ext cx="1386840" cy="368300"/>
+          </a:xfrm>
+          <a:prstGeom prst="rect">
+            <a:avLst/>
+          </a:prstGeom>
+          <a:noFill/>
+        </p:spPr>
+        <p:txBody>
+          <a:bodyPr wrap="square" rtlCol="0">
+            <a:spAutoFit/>
+          </a:bodyPr>
+          <a:p>
+            <a:r>
+              <a:rPr lang="zh-CN" altLang="en-US"/>
+              <a:t>立直音乐</a:t>
+            </a:r>
+            <a:endParaRPr lang="zh-CN" altLang="en-US"/>
+          </a:p>
+        </p:txBody>
+      </p:sp>
+      <p:sp>
+        <p:nvSpPr>
+          <p:cNvPr id="19" name="文本框 18"/>
+          <p:cNvSpPr txBox="1"/>
+          <p:nvPr/>
+        </p:nvSpPr>
+        <p:spPr>
+          <a:xfrm>
+            <a:off x="7759065" y="2392045"/>
+            <a:ext cx="1386840" cy="368300"/>
+          </a:xfrm>
+          <a:prstGeom prst="rect">
+            <a:avLst/>
+          </a:prstGeom>
+          <a:noFill/>
+        </p:spPr>
+        <p:txBody>
+          <a:bodyPr wrap="square" rtlCol="0">
+            <a:spAutoFit/>
+          </a:bodyPr>
+          <a:p>
+            <a:r>
+              <a:rPr lang="zh-CN" altLang="en-US"/>
+              <a:t>语音</a:t>
+            </a:r>
+            <a:endParaRPr lang="zh-CN" altLang="en-US"/>
+          </a:p>
+        </p:txBody>
+      </p:sp>
+      <p:pic>
+        <p:nvPicPr>
+          <p:cNvPr id="20" name="图片 19"/>
+          <p:cNvPicPr>
+            <a:picLocks noChangeAspect="1"/>
+          </p:cNvPicPr>
+          <p:nvPr/>
+        </p:nvPicPr>
+        <p:blipFill>
+          <a:blip r:embed="rId1"/>
+          <a:stretch>
+            <a:fillRect/>
+          </a:stretch>
+        </p:blipFill>
+        <p:spPr>
+          <a:xfrm>
+            <a:off x="896620" y="2903855"/>
+            <a:ext cx="152400" cy="171450"/>
+          </a:xfrm>
+          <a:prstGeom prst="rect">
+            <a:avLst/>
+          </a:prstGeom>
+        </p:spPr>
+      </p:pic>
+      <p:sp>
+        <p:nvSpPr>
+          <p:cNvPr id="26" name="文本框 25"/>
+          <p:cNvSpPr txBox="1"/>
+          <p:nvPr/>
+        </p:nvSpPr>
+        <p:spPr>
+          <a:xfrm>
+            <a:off x="10047605" y="2392045"/>
+            <a:ext cx="1386840" cy="368300"/>
+          </a:xfrm>
+          <a:prstGeom prst="rect">
+            <a:avLst/>
+          </a:prstGeom>
+          <a:noFill/>
+        </p:spPr>
+        <p:txBody>
+          <a:bodyPr wrap="square" rtlCol="0">
+            <a:spAutoFit/>
+          </a:bodyPr>
+          <a:p>
+            <a:r>
+              <a:rPr lang="zh-CN" altLang="en-US"/>
+              <a:t>打牌</a:t>
+            </a:r>
+            <a:r>
+              <a:rPr lang="zh-CN" altLang="en-US"/>
+              <a:t>音效</a:t>
+            </a:r>
+            <a:endParaRPr lang="zh-CN" altLang="en-US"/>
+          </a:p>
+        </p:txBody>
+      </p:sp>
+      <p:cxnSp>
+        <p:nvCxnSpPr>
+          <p:cNvPr id="28" name="直接箭头连接符 27"/>
+          <p:cNvCxnSpPr/>
+          <p:nvPr/>
+        </p:nvCxnSpPr>
+        <p:spPr>
+          <a:xfrm flipV="1">
+            <a:off x="1096010" y="2978150"/>
+            <a:ext cx="674370" cy="9525"/>
+          </a:xfrm>
+          <a:prstGeom prst="straightConnector1">
+            <a:avLst/>
+          </a:prstGeom>
+          <a:ln>
+            <a:tailEnd type="arrow"/>
+          </a:ln>
+        </p:spPr>
+        <p:style>
+          <a:lnRef idx="2">
+            <a:schemeClr val="accent1"/>
+          </a:lnRef>
+          <a:fillRef idx="0">
+            <a:srgbClr val="FFFFFF"/>
+          </a:fillRef>
+          <a:effectRef idx="0">
+            <a:srgbClr val="FFFFFF"/>
+          </a:effectRef>
+          <a:fontRef idx="minor">
+            <a:schemeClr val="tx1"/>
+          </a:fontRef>
+        </p:style>
+      </p:cxnSp>
+      <p:sp>
+        <p:nvSpPr>
+          <p:cNvPr id="33" name="文本框 32"/>
+          <p:cNvSpPr txBox="1"/>
+          <p:nvPr/>
+        </p:nvSpPr>
+        <p:spPr>
+          <a:xfrm>
+            <a:off x="1817370" y="2760345"/>
+            <a:ext cx="918210" cy="368300"/>
+          </a:xfrm>
+          <a:prstGeom prst="rect">
+            <a:avLst/>
+          </a:prstGeom>
+          <a:noFill/>
+        </p:spPr>
+        <p:txBody>
+          <a:bodyPr wrap="square" rtlCol="0">
+            <a:spAutoFit/>
+          </a:bodyPr>
+          <a:p>
+            <a:r>
+              <a:rPr lang="zh-CN" altLang="en-US"/>
+              <a:t>开启</a:t>
+            </a:r>
+            <a:endParaRPr lang="zh-CN" altLang="en-US"/>
+          </a:p>
+        </p:txBody>
+      </p:sp>
+      <p:sp>
+        <p:nvSpPr>
+          <p:cNvPr id="35" name="矩形 34"/>
+          <p:cNvSpPr/>
+          <p:nvPr/>
+        </p:nvSpPr>
+        <p:spPr>
+          <a:xfrm>
+            <a:off x="812800" y="3302635"/>
+            <a:ext cx="1529080" cy="1597025"/>
+          </a:xfrm>
+          <a:prstGeom prst="rect">
+            <a:avLst/>
+          </a:prstGeom>
+        </p:spPr>
+        <p:style>
+          <a:lnRef idx="2">
+            <a:schemeClr val="accent1"/>
+          </a:lnRef>
+          <a:fillRef idx="0">
+            <a:srgbClr val="FFFFFF"/>
+          </a:fillRef>
+          <a:effectRef idx="0">
+            <a:srgbClr val="FFFFFF"/>
+          </a:effectRef>
+          <a:fontRef idx="minor">
+            <a:schemeClr val="tx1"/>
+          </a:fontRef>
+        </p:style>
+        <p:txBody>
+          <a:bodyPr rtlCol="0" anchor="ctr"/>
+          <a:p>
+            <a:pPr algn="ctr"/>
+            <a:endParaRPr lang="zh-CN" altLang="en-US"/>
+          </a:p>
+        </p:txBody>
+      </p:sp>
+      <p:sp>
+        <p:nvSpPr>
+          <p:cNvPr id="36" name="文本框 35"/>
+          <p:cNvSpPr txBox="1"/>
+          <p:nvPr/>
+        </p:nvSpPr>
+        <p:spPr>
+          <a:xfrm>
+            <a:off x="948690" y="3128645"/>
+            <a:ext cx="821690" cy="368300"/>
+          </a:xfrm>
+          <a:prstGeom prst="rect">
+            <a:avLst/>
+          </a:prstGeom>
+          <a:noFill/>
+        </p:spPr>
+        <p:txBody>
+          <a:bodyPr wrap="square" rtlCol="0">
+            <a:spAutoFit/>
+          </a:bodyPr>
+          <a:p>
+            <a:r>
+              <a:rPr lang="zh-CN" altLang="en-US"/>
+              <a:t>曲目</a:t>
+            </a:r>
+            <a:endParaRPr lang="zh-CN" altLang="en-US"/>
+          </a:p>
+        </p:txBody>
+      </p:sp>
+      <p:graphicFrame>
+        <p:nvGraphicFramePr>
+          <p:cNvPr id="37" name="表格 36"/>
+          <p:cNvGraphicFramePr/>
+          <p:nvPr>
+            <p:custDataLst>
+              <p:tags r:id="rId2"/>
+            </p:custDataLst>
+          </p:nvPr>
+        </p:nvGraphicFramePr>
+        <p:xfrm>
+          <a:off x="807720" y="3496945"/>
+          <a:ext cx="1534795" cy="1143000"/>
+        </p:xfrm>
+        <a:graphic>
+          <a:graphicData uri="http://schemas.openxmlformats.org/drawingml/2006/table">
+            <a:tbl>
+              <a:tblPr firstRow="1" bandRow="1">
+                <a:tableStyleId>{5C22544A-7EE6-4342-B048-85BDC9FD1C3A}</a:tableStyleId>
+              </a:tblPr>
+              <a:tblGrid>
+                <a:gridCol w="1534795"/>
+              </a:tblGrid>
+              <a:tr h="381000">
+                <a:tc>
+                  <a:txBody>
+                    <a:bodyPr/>
+                    <a:p>
+                      <a:pPr>
+                        <a:buNone/>
+                      </a:pPr>
+                      <a:r>
+                        <a:rPr lang="en-US" altLang="zh-CN"/>
+                        <a:t>AA</a:t>
+                      </a:r>
+                      <a:endParaRPr lang="en-US" altLang="zh-CN"/>
+                    </a:p>
+                  </a:txBody>
+                  <a:tcPr/>
+                </a:tc>
+              </a:tr>
+              <a:tr h="381000">
+                <a:tc>
+                  <a:txBody>
+                    <a:bodyPr/>
+                    <a:p>
+                      <a:pPr>
+                        <a:buNone/>
+                      </a:pPr>
+                      <a:r>
+                        <a:rPr lang="en-US" altLang="zh-CN"/>
+                        <a:t>BB</a:t>
+                      </a:r>
+                      <a:endParaRPr lang="en-US" altLang="zh-CN"/>
+                    </a:p>
+                  </a:txBody>
+                  <a:tcPr/>
+                </a:tc>
+              </a:tr>
+              <a:tr h="381000">
+                <a:tc>
+                  <a:txBody>
+                    <a:bodyPr/>
+                    <a:p>
+                      <a:pPr>
+                        <a:buNone/>
+                      </a:pPr>
+                      <a:r>
+                        <a:rPr lang="en-US" altLang="zh-CN"/>
+                        <a:t>CC</a:t>
+                      </a:r>
+                      <a:endParaRPr lang="en-US" altLang="zh-CN"/>
+                    </a:p>
+                  </a:txBody>
+                  <a:tcPr/>
+                </a:tc>
+              </a:tr>
+            </a:tbl>
+          </a:graphicData>
+        </a:graphic>
+      </p:graphicFrame>
+      <p:sp>
+        <p:nvSpPr>
+          <p:cNvPr id="38" name="圆角矩形 37"/>
+          <p:cNvSpPr/>
+          <p:nvPr/>
+        </p:nvSpPr>
+        <p:spPr>
+          <a:xfrm>
+            <a:off x="812800" y="5149215"/>
+            <a:ext cx="1513840" cy="805815"/>
+          </a:xfrm>
+          <a:prstGeom prst="roundRect">
+            <a:avLst/>
+          </a:prstGeom>
+        </p:spPr>
+        <p:style>
+          <a:lnRef idx="2">
+            <a:schemeClr val="accent1">
+              <a:lumMod val="75000"/>
+            </a:schemeClr>
+          </a:lnRef>
+          <a:fillRef idx="1">
+            <a:schemeClr val="accent1"/>
+          </a:fillRef>
+          <a:effectRef idx="0">
+            <a:srgbClr val="FFFFFF"/>
+          </a:effectRef>
+          <a:fontRef idx="minor">
+            <a:schemeClr val="lt1"/>
+          </a:fontRef>
+        </p:style>
+        <p:txBody>
+          <a:bodyPr rtlCol="0" anchor="ctr"/>
+          <a:p>
+            <a:pPr algn="ctr"/>
+            <a:r>
+              <a:rPr lang="zh-CN" altLang="en-US"/>
+              <a:t>随机播放</a:t>
+            </a:r>
+            <a:endParaRPr lang="zh-CN" altLang="en-US"/>
+          </a:p>
+          <a:p>
+            <a:pPr algn="ctr"/>
+            <a:r>
+              <a:rPr lang="zh-CN" altLang="en-US"/>
+              <a:t>顺序播放</a:t>
+            </a:r>
+            <a:endParaRPr lang="zh-CN" altLang="en-US"/>
+          </a:p>
+          <a:p>
+            <a:pPr algn="ctr"/>
+            <a:r>
+              <a:rPr lang="zh-CN" altLang="en-US"/>
+              <a:t>单曲循环</a:t>
+            </a:r>
+            <a:endParaRPr lang="zh-CN" altLang="en-US"/>
+          </a:p>
+        </p:txBody>
+      </p:sp>
+      <p:sp>
+        <p:nvSpPr>
+          <p:cNvPr id="39" name="文本框 38"/>
+          <p:cNvSpPr txBox="1"/>
+          <p:nvPr/>
+        </p:nvSpPr>
+        <p:spPr>
+          <a:xfrm>
+            <a:off x="807720" y="4531360"/>
+            <a:ext cx="1463040" cy="368300"/>
+          </a:xfrm>
+          <a:prstGeom prst="rect">
+            <a:avLst/>
+          </a:prstGeom>
+          <a:noFill/>
+        </p:spPr>
+        <p:txBody>
+          <a:bodyPr wrap="square" rtlCol="0">
+            <a:spAutoFit/>
+          </a:bodyPr>
+          <a:p>
+            <a:r>
+              <a:rPr lang="en-US" altLang="zh-CN"/>
+              <a:t>+</a:t>
+            </a:r>
+            <a:endParaRPr lang="en-US" altLang="zh-CN"/>
+          </a:p>
+        </p:txBody>
+      </p:sp>
+      <p:sp>
+        <p:nvSpPr>
+          <p:cNvPr id="40" name="椭圆 39"/>
+          <p:cNvSpPr/>
+          <p:nvPr/>
+        </p:nvSpPr>
+        <p:spPr>
+          <a:xfrm>
+            <a:off x="861060" y="4653280"/>
+            <a:ext cx="226695" cy="198120"/>
+          </a:xfrm>
+          <a:prstGeom prst="ellipse">
+            <a:avLst/>
+          </a:prstGeom>
+        </p:spPr>
+        <p:style>
+          <a:lnRef idx="2">
+            <a:schemeClr val="accent1"/>
+          </a:lnRef>
+          <a:fillRef idx="0">
+            <a:srgbClr val="FFFFFF"/>
+          </a:fillRef>
+          <a:effectRef idx="0">
+            <a:srgbClr val="FFFFFF"/>
+          </a:effectRef>
+          <a:fontRef idx="minor">
+            <a:schemeClr val="tx1"/>
+          </a:fontRef>
+        </p:style>
+        <p:txBody>
+          <a:bodyPr rtlCol="0" anchor="ctr"/>
+          <a:p>
+            <a:pPr algn="ctr"/>
+            <a:endParaRPr lang="zh-CN" altLang="en-US"/>
+          </a:p>
+        </p:txBody>
+      </p:sp>
+      <p:sp>
+        <p:nvSpPr>
+          <p:cNvPr id="41" name="椭圆 40"/>
+          <p:cNvSpPr/>
+          <p:nvPr/>
+        </p:nvSpPr>
+        <p:spPr>
+          <a:xfrm>
+            <a:off x="822325" y="5214620"/>
+            <a:ext cx="226695" cy="198120"/>
+          </a:xfrm>
+          <a:prstGeom prst="ellipse">
+            <a:avLst/>
+          </a:prstGeom>
+          <a:ln>
+            <a:solidFill>
+              <a:schemeClr val="tx1"/>
+            </a:solidFill>
+          </a:ln>
+        </p:spPr>
+        <p:style>
+          <a:lnRef idx="2">
+            <a:schemeClr val="accent1"/>
+          </a:lnRef>
+          <a:fillRef idx="0">
+            <a:srgbClr val="FFFFFF"/>
+          </a:fillRef>
+          <a:effectRef idx="0">
+            <a:srgbClr val="FFFFFF"/>
+          </a:effectRef>
+          <a:fontRef idx="minor">
+            <a:schemeClr val="tx1"/>
+          </a:fontRef>
+        </p:style>
+        <p:txBody>
+          <a:bodyPr rtlCol="0" anchor="ctr"/>
+          <a:p>
+            <a:pPr algn="ctr"/>
+            <a:endParaRPr lang="zh-CN" altLang="en-US"/>
+          </a:p>
+        </p:txBody>
+      </p:sp>
+      <p:sp>
+        <p:nvSpPr>
+          <p:cNvPr id="42" name="椭圆 41"/>
+          <p:cNvSpPr/>
+          <p:nvPr/>
+        </p:nvSpPr>
+        <p:spPr>
+          <a:xfrm>
+            <a:off x="812800" y="5669280"/>
+            <a:ext cx="226695" cy="198120"/>
+          </a:xfrm>
+          <a:prstGeom prst="ellipse">
+            <a:avLst/>
+          </a:prstGeom>
+          <a:ln>
+            <a:solidFill>
+              <a:schemeClr val="tx1"/>
+            </a:solidFill>
+          </a:ln>
+        </p:spPr>
+        <p:style>
+          <a:lnRef idx="2">
+            <a:schemeClr val="accent1"/>
+          </a:lnRef>
+          <a:fillRef idx="0">
+            <a:srgbClr val="FFFFFF"/>
+          </a:fillRef>
+          <a:effectRef idx="0">
+            <a:srgbClr val="FFFFFF"/>
+          </a:effectRef>
+          <a:fontRef idx="minor">
+            <a:schemeClr val="tx1"/>
+          </a:fontRef>
+        </p:style>
+        <p:txBody>
+          <a:bodyPr rtlCol="0" anchor="ctr"/>
+          <a:p>
+            <a:pPr algn="ctr"/>
+            <a:endParaRPr lang="zh-CN" altLang="en-US"/>
+          </a:p>
+        </p:txBody>
+      </p:sp>
+      <p:sp>
+        <p:nvSpPr>
+          <p:cNvPr id="43" name="椭圆 42"/>
+          <p:cNvSpPr/>
+          <p:nvPr/>
+        </p:nvSpPr>
+        <p:spPr>
+          <a:xfrm>
+            <a:off x="812800" y="5441950"/>
+            <a:ext cx="226695" cy="198120"/>
+          </a:xfrm>
+          <a:prstGeom prst="ellipse">
+            <a:avLst/>
+          </a:prstGeom>
+          <a:ln>
+            <a:solidFill>
+              <a:schemeClr val="tx1"/>
+            </a:solidFill>
+          </a:ln>
+        </p:spPr>
+        <p:style>
+          <a:lnRef idx="2">
+            <a:schemeClr val="accent1"/>
+          </a:lnRef>
+          <a:fillRef idx="0">
+            <a:srgbClr val="FFFFFF"/>
+          </a:fillRef>
+          <a:effectRef idx="0">
+            <a:srgbClr val="FFFFFF"/>
+          </a:effectRef>
+          <a:fontRef idx="minor">
+            <a:schemeClr val="tx1"/>
+          </a:fontRef>
+        </p:style>
+        <p:txBody>
+          <a:bodyPr rtlCol="0" anchor="ctr"/>
+          <a:p>
+            <a:pPr algn="ctr"/>
+            <a:endParaRPr lang="zh-CN" altLang="en-US"/>
+          </a:p>
+        </p:txBody>
+      </p:sp>
+      <p:sp>
+        <p:nvSpPr>
+          <p:cNvPr id="44" name="减号 43"/>
+          <p:cNvSpPr/>
+          <p:nvPr/>
+        </p:nvSpPr>
+        <p:spPr>
+          <a:xfrm>
+            <a:off x="2356485" y="3592195"/>
+            <a:ext cx="193675" cy="193040"/>
+          </a:xfrm>
+          <a:prstGeom prst="mathMinus">
+            <a:avLst/>
+          </a:prstGeom>
+        </p:spPr>
+        <p:style>
+          <a:lnRef idx="2">
+            <a:schemeClr val="accent1">
+              <a:lumMod val="75000"/>
+            </a:schemeClr>
+          </a:lnRef>
+          <a:fillRef idx="1">
+            <a:schemeClr val="accent1"/>
+          </a:fillRef>
+          <a:effectRef idx="0">
+            <a:srgbClr val="FFFFFF"/>
+          </a:effectRef>
+          <a:fontRef idx="minor">
+            <a:schemeClr val="lt1"/>
+          </a:fontRef>
+        </p:style>
+        <p:txBody>
+          <a:bodyPr rtlCol="0" anchor="ctr"/>
+          <a:p>
+            <a:pPr algn="ctr"/>
+            <a:endParaRPr lang="zh-CN" altLang="en-US"/>
+          </a:p>
+        </p:txBody>
+      </p:sp>
+      <p:sp>
+        <p:nvSpPr>
+          <p:cNvPr id="45" name="等于号 44"/>
+          <p:cNvSpPr/>
+          <p:nvPr/>
+        </p:nvSpPr>
+        <p:spPr>
+          <a:xfrm>
+            <a:off x="2084705" y="3557905"/>
+            <a:ext cx="198755" cy="203835"/>
+          </a:xfrm>
+          <a:prstGeom prst="mathEqual">
+            <a:avLst/>
+          </a:prstGeom>
+          <a:solidFill>
+            <a:schemeClr val="tx1"/>
+          </a:solidFill>
+        </p:spPr>
+        <p:style>
+          <a:lnRef idx="2">
+            <a:schemeClr val="accent1">
+              <a:lumMod val="75000"/>
+            </a:schemeClr>
+          </a:lnRef>
+          <a:fillRef idx="1">
+            <a:schemeClr val="accent1"/>
+          </a:fillRef>
+          <a:effectRef idx="0">
+            <a:srgbClr val="FFFFFF"/>
+          </a:effectRef>
+          <a:fontRef idx="minor">
+            <a:schemeClr val="lt1"/>
+          </a:fontRef>
+        </p:style>
+        <p:txBody>
+          <a:bodyPr rtlCol="0" anchor="ctr"/>
+          <a:p>
+            <a:pPr algn="ctr"/>
+            <a:endParaRPr lang="zh-CN" altLang="en-US">
+              <a:solidFill>
+                <a:schemeClr val="tx1"/>
+              </a:solidFill>
+            </a:endParaRPr>
+          </a:p>
+        </p:txBody>
+      </p:sp>
+      <p:sp>
+        <p:nvSpPr>
+          <p:cNvPr id="46" name="等于号 45"/>
+          <p:cNvSpPr/>
+          <p:nvPr/>
+        </p:nvSpPr>
+        <p:spPr>
+          <a:xfrm>
+            <a:off x="2072005" y="3966210"/>
+            <a:ext cx="198755" cy="203835"/>
+          </a:xfrm>
+          <a:prstGeom prst="mathEqual">
+            <a:avLst/>
+          </a:prstGeom>
+          <a:solidFill>
+            <a:schemeClr val="tx1"/>
+          </a:solidFill>
+        </p:spPr>
+        <p:style>
+          <a:lnRef idx="2">
+            <a:schemeClr val="accent1">
+              <a:lumMod val="75000"/>
+            </a:schemeClr>
+          </a:lnRef>
+          <a:fillRef idx="1">
+            <a:schemeClr val="accent1"/>
+          </a:fillRef>
+          <a:effectRef idx="0">
+            <a:srgbClr val="FFFFFF"/>
+          </a:effectRef>
+          <a:fontRef idx="minor">
+            <a:schemeClr val="lt1"/>
+          </a:fontRef>
+        </p:style>
+        <p:txBody>
+          <a:bodyPr rtlCol="0" anchor="ctr"/>
+          <a:p>
+            <a:pPr algn="ctr"/>
+            <a:endParaRPr lang="zh-CN" altLang="en-US">
+              <a:solidFill>
+                <a:schemeClr val="tx1"/>
+              </a:solidFill>
+            </a:endParaRPr>
+          </a:p>
+        </p:txBody>
+      </p:sp>
+      <p:sp>
+        <p:nvSpPr>
+          <p:cNvPr id="47" name="等于号 46"/>
+          <p:cNvSpPr/>
+          <p:nvPr/>
+        </p:nvSpPr>
+        <p:spPr>
+          <a:xfrm>
+            <a:off x="2072005" y="4353560"/>
+            <a:ext cx="198755" cy="203835"/>
+          </a:xfrm>
+          <a:prstGeom prst="mathEqual">
+            <a:avLst/>
+          </a:prstGeom>
+          <a:solidFill>
+            <a:schemeClr val="tx1"/>
+          </a:solidFill>
+        </p:spPr>
+        <p:style>
+          <a:lnRef idx="2">
+            <a:schemeClr val="accent1">
+              <a:lumMod val="75000"/>
+            </a:schemeClr>
+          </a:lnRef>
+          <a:fillRef idx="1">
+            <a:schemeClr val="accent1"/>
+          </a:fillRef>
+          <a:effectRef idx="0">
+            <a:srgbClr val="FFFFFF"/>
+          </a:effectRef>
+          <a:fontRef idx="minor">
+            <a:schemeClr val="lt1"/>
+          </a:fontRef>
+        </p:style>
+        <p:txBody>
+          <a:bodyPr rtlCol="0" anchor="ctr"/>
+          <a:p>
+            <a:pPr algn="ctr"/>
+            <a:endParaRPr lang="zh-CN" altLang="en-US">
+              <a:solidFill>
+                <a:schemeClr val="tx1"/>
+              </a:solidFill>
+            </a:endParaRPr>
+          </a:p>
+        </p:txBody>
+      </p:sp>
+      <p:sp>
+        <p:nvSpPr>
+          <p:cNvPr id="48" name="圆角矩形 47"/>
+          <p:cNvSpPr/>
+          <p:nvPr/>
+        </p:nvSpPr>
+        <p:spPr>
+          <a:xfrm>
+            <a:off x="2867025" y="2571750"/>
+            <a:ext cx="1926590" cy="2743835"/>
+          </a:xfrm>
+          <a:prstGeom prst="roundRect">
+            <a:avLst/>
+          </a:prstGeom>
+        </p:spPr>
+        <p:style>
+          <a:lnRef idx="2">
+            <a:schemeClr val="accent1"/>
+          </a:lnRef>
+          <a:fillRef idx="0">
+            <a:srgbClr val="FFFFFF"/>
+          </a:fillRef>
+          <a:effectRef idx="0">
+            <a:srgbClr val="FFFFFF"/>
+          </a:effectRef>
+          <a:fontRef idx="minor">
+            <a:schemeClr val="tx1"/>
+          </a:fontRef>
+        </p:style>
+        <p:txBody>
+          <a:bodyPr rtlCol="0" anchor="ctr"/>
+          <a:p>
+            <a:pPr algn="ctr"/>
+            <a:endParaRPr lang="zh-CN" altLang="en-US"/>
+          </a:p>
+        </p:txBody>
+      </p:sp>
+      <p:pic>
+        <p:nvPicPr>
+          <p:cNvPr id="49" name="图片 48"/>
+          <p:cNvPicPr>
+            <a:picLocks noChangeAspect="1"/>
+          </p:cNvPicPr>
+          <p:nvPr/>
+        </p:nvPicPr>
+        <p:blipFill>
+          <a:blip r:embed="rId1"/>
+          <a:stretch>
+            <a:fillRect/>
+          </a:stretch>
+        </p:blipFill>
+        <p:spPr>
+          <a:xfrm>
+            <a:off x="3140075" y="2870200"/>
+            <a:ext cx="152400" cy="171450"/>
+          </a:xfrm>
+          <a:prstGeom prst="rect">
+            <a:avLst/>
+          </a:prstGeom>
+        </p:spPr>
+      </p:pic>
+      <p:cxnSp>
+        <p:nvCxnSpPr>
+          <p:cNvPr id="50" name="直接箭头连接符 49"/>
+          <p:cNvCxnSpPr/>
+          <p:nvPr/>
+        </p:nvCxnSpPr>
+        <p:spPr>
+          <a:xfrm flipV="1">
+            <a:off x="3339465" y="2944495"/>
+            <a:ext cx="674370" cy="9525"/>
+          </a:xfrm>
+          <a:prstGeom prst="straightConnector1">
+            <a:avLst/>
+          </a:prstGeom>
+          <a:ln>
+            <a:tailEnd type="arrow"/>
+          </a:ln>
+        </p:spPr>
+        <p:style>
+          <a:lnRef idx="2">
+            <a:schemeClr val="accent1"/>
+          </a:lnRef>
+          <a:fillRef idx="0">
+            <a:srgbClr val="FFFFFF"/>
+          </a:fillRef>
+          <a:effectRef idx="0">
+            <a:srgbClr val="FFFFFF"/>
+          </a:effectRef>
+          <a:fontRef idx="minor">
+            <a:schemeClr val="tx1"/>
+          </a:fontRef>
+        </p:style>
+      </p:cxnSp>
+      <p:sp>
+        <p:nvSpPr>
+          <p:cNvPr id="51" name="文本框 50"/>
+          <p:cNvSpPr txBox="1"/>
+          <p:nvPr/>
+        </p:nvSpPr>
+        <p:spPr>
+          <a:xfrm>
+            <a:off x="4060825" y="2726690"/>
+            <a:ext cx="918210" cy="368300"/>
+          </a:xfrm>
+          <a:prstGeom prst="rect">
+            <a:avLst/>
+          </a:prstGeom>
+          <a:noFill/>
+        </p:spPr>
+        <p:txBody>
+          <a:bodyPr wrap="square" rtlCol="0">
+            <a:spAutoFit/>
+          </a:bodyPr>
+          <a:p>
+            <a:r>
+              <a:rPr lang="zh-CN" altLang="en-US"/>
+              <a:t>开启</a:t>
+            </a:r>
+            <a:endParaRPr lang="zh-CN" altLang="en-US"/>
+          </a:p>
+        </p:txBody>
+      </p:sp>
+      <p:sp>
+        <p:nvSpPr>
+          <p:cNvPr id="52" name="矩形 51"/>
+          <p:cNvSpPr/>
+          <p:nvPr/>
+        </p:nvSpPr>
+        <p:spPr>
+          <a:xfrm>
+            <a:off x="3056255" y="3268980"/>
+            <a:ext cx="1529080" cy="1597025"/>
+          </a:xfrm>
+          <a:prstGeom prst="rect">
+            <a:avLst/>
+          </a:prstGeom>
+        </p:spPr>
+        <p:style>
+          <a:lnRef idx="2">
+            <a:schemeClr val="accent1"/>
+          </a:lnRef>
+          <a:fillRef idx="0">
+            <a:srgbClr val="FFFFFF"/>
+          </a:fillRef>
+          <a:effectRef idx="0">
+            <a:srgbClr val="FFFFFF"/>
+          </a:effectRef>
+          <a:fontRef idx="minor">
+            <a:schemeClr val="tx1"/>
+          </a:fontRef>
+        </p:style>
+        <p:txBody>
+          <a:bodyPr rtlCol="0" anchor="ctr"/>
+          <a:p>
+            <a:pPr algn="ctr"/>
+            <a:endParaRPr lang="zh-CN" altLang="en-US"/>
+          </a:p>
+        </p:txBody>
+      </p:sp>
+      <p:sp>
+        <p:nvSpPr>
+          <p:cNvPr id="53" name="文本框 52"/>
+          <p:cNvSpPr txBox="1"/>
+          <p:nvPr/>
+        </p:nvSpPr>
+        <p:spPr>
+          <a:xfrm>
+            <a:off x="3192145" y="3094990"/>
+            <a:ext cx="821690" cy="368300"/>
+          </a:xfrm>
+          <a:prstGeom prst="rect">
+            <a:avLst/>
+          </a:prstGeom>
+          <a:noFill/>
+        </p:spPr>
+        <p:txBody>
+          <a:bodyPr wrap="square" rtlCol="0">
+            <a:spAutoFit/>
+          </a:bodyPr>
+          <a:p>
+            <a:r>
+              <a:rPr lang="zh-CN" altLang="en-US"/>
+              <a:t>曲目</a:t>
+            </a:r>
+            <a:endParaRPr lang="zh-CN" altLang="en-US"/>
+          </a:p>
+        </p:txBody>
+      </p:sp>
+      <p:graphicFrame>
+        <p:nvGraphicFramePr>
+          <p:cNvPr id="54" name="表格 53"/>
+          <p:cNvGraphicFramePr/>
+          <p:nvPr>
+            <p:custDataLst>
+              <p:tags r:id="rId3"/>
+            </p:custDataLst>
+          </p:nvPr>
+        </p:nvGraphicFramePr>
+        <p:xfrm>
+          <a:off x="3051175" y="3463290"/>
+          <a:ext cx="1534795" cy="1143000"/>
+        </p:xfrm>
+        <a:graphic>
+          <a:graphicData uri="http://schemas.openxmlformats.org/drawingml/2006/table">
+            <a:tbl>
+              <a:tblPr firstRow="1" bandRow="1">
+                <a:tableStyleId>{5C22544A-7EE6-4342-B048-85BDC9FD1C3A}</a:tableStyleId>
+              </a:tblPr>
+              <a:tblGrid>
+                <a:gridCol w="1534795"/>
+              </a:tblGrid>
+              <a:tr h="381000">
+                <a:tc>
+                  <a:txBody>
+                    <a:bodyPr/>
+                    <a:p>
+                      <a:pPr>
+                        <a:buNone/>
+                      </a:pPr>
+                      <a:r>
+                        <a:rPr lang="en-US" altLang="zh-CN"/>
+                        <a:t>AA</a:t>
+                      </a:r>
+                      <a:endParaRPr lang="en-US" altLang="zh-CN"/>
+                    </a:p>
+                  </a:txBody>
+                  <a:tcPr/>
+                </a:tc>
+              </a:tr>
+              <a:tr h="381000">
+                <a:tc>
+                  <a:txBody>
+                    <a:bodyPr/>
+                    <a:p>
+                      <a:pPr>
+                        <a:buNone/>
+                      </a:pPr>
+                      <a:r>
+                        <a:rPr lang="en-US" altLang="zh-CN"/>
+                        <a:t>BB</a:t>
+                      </a:r>
+                      <a:endParaRPr lang="en-US" altLang="zh-CN"/>
+                    </a:p>
+                  </a:txBody>
+                  <a:tcPr/>
+                </a:tc>
+              </a:tr>
+              <a:tr h="381000">
+                <a:tc>
+                  <a:txBody>
+                    <a:bodyPr/>
+                    <a:p>
+                      <a:pPr>
+                        <a:buNone/>
+                      </a:pPr>
+                      <a:r>
+                        <a:rPr lang="en-US" altLang="zh-CN"/>
+                        <a:t>CC</a:t>
+                      </a:r>
+                      <a:endParaRPr lang="en-US" altLang="zh-CN"/>
+                    </a:p>
+                  </a:txBody>
+                  <a:tcPr/>
+                </a:tc>
+              </a:tr>
+            </a:tbl>
+          </a:graphicData>
+        </a:graphic>
+      </p:graphicFrame>
+      <p:sp>
+        <p:nvSpPr>
+          <p:cNvPr id="55" name="圆角矩形 54"/>
+          <p:cNvSpPr/>
+          <p:nvPr/>
+        </p:nvSpPr>
+        <p:spPr>
+          <a:xfrm>
+            <a:off x="3056255" y="5115560"/>
+            <a:ext cx="1513840" cy="805815"/>
+          </a:xfrm>
+          <a:prstGeom prst="roundRect">
+            <a:avLst/>
+          </a:prstGeom>
+        </p:spPr>
+        <p:style>
+          <a:lnRef idx="2">
+            <a:schemeClr val="accent1">
+              <a:lumMod val="75000"/>
+            </a:schemeClr>
+          </a:lnRef>
+          <a:fillRef idx="1">
+            <a:schemeClr val="accent1"/>
+          </a:fillRef>
+          <a:effectRef idx="0">
+            <a:srgbClr val="FFFFFF"/>
+          </a:effectRef>
+          <a:fontRef idx="minor">
+            <a:schemeClr val="lt1"/>
+          </a:fontRef>
+        </p:style>
+        <p:txBody>
+          <a:bodyPr rtlCol="0" anchor="ctr"/>
+          <a:p>
+            <a:pPr algn="ctr"/>
+            <a:r>
+              <a:rPr lang="zh-CN" altLang="en-US"/>
+              <a:t>随机播放</a:t>
+            </a:r>
+            <a:endParaRPr lang="zh-CN" altLang="en-US"/>
+          </a:p>
+          <a:p>
+            <a:pPr algn="ctr"/>
+            <a:r>
+              <a:rPr lang="zh-CN" altLang="en-US"/>
+              <a:t>顺序播放</a:t>
+            </a:r>
+            <a:endParaRPr lang="zh-CN" altLang="en-US"/>
+          </a:p>
+          <a:p>
+            <a:pPr algn="ctr"/>
+            <a:r>
+              <a:rPr lang="zh-CN" altLang="en-US"/>
+              <a:t>单曲循环</a:t>
+            </a:r>
+            <a:endParaRPr lang="zh-CN" altLang="en-US"/>
+          </a:p>
+        </p:txBody>
+      </p:sp>
+      <p:sp>
+        <p:nvSpPr>
+          <p:cNvPr id="56" name="文本框 55"/>
+          <p:cNvSpPr txBox="1"/>
+          <p:nvPr/>
+        </p:nvSpPr>
+        <p:spPr>
+          <a:xfrm>
+            <a:off x="3051175" y="4497705"/>
+            <a:ext cx="1463040" cy="368300"/>
+          </a:xfrm>
+          <a:prstGeom prst="rect">
+            <a:avLst/>
+          </a:prstGeom>
+          <a:noFill/>
+        </p:spPr>
+        <p:txBody>
+          <a:bodyPr wrap="square" rtlCol="0">
+            <a:spAutoFit/>
+          </a:bodyPr>
+          <a:p>
+            <a:r>
+              <a:rPr lang="en-US" altLang="zh-CN"/>
+              <a:t>+</a:t>
+            </a:r>
+            <a:endParaRPr lang="en-US" altLang="zh-CN"/>
+          </a:p>
+        </p:txBody>
+      </p:sp>
+      <p:sp>
+        <p:nvSpPr>
+          <p:cNvPr id="57" name="椭圆 56"/>
+          <p:cNvSpPr/>
+          <p:nvPr/>
+        </p:nvSpPr>
+        <p:spPr>
+          <a:xfrm>
+            <a:off x="3104515" y="4619625"/>
+            <a:ext cx="226695" cy="198120"/>
+          </a:xfrm>
+          <a:prstGeom prst="ellipse">
+            <a:avLst/>
+          </a:prstGeom>
+        </p:spPr>
+        <p:style>
+          <a:lnRef idx="2">
+            <a:schemeClr val="accent1"/>
+          </a:lnRef>
+          <a:fillRef idx="0">
+            <a:srgbClr val="FFFFFF"/>
+          </a:fillRef>
+          <a:effectRef idx="0">
+            <a:srgbClr val="FFFFFF"/>
+          </a:effectRef>
+          <a:fontRef idx="minor">
+            <a:schemeClr val="tx1"/>
+          </a:fontRef>
+        </p:style>
+        <p:txBody>
+          <a:bodyPr rtlCol="0" anchor="ctr"/>
+          <a:p>
+            <a:pPr algn="ctr"/>
+            <a:endParaRPr lang="zh-CN" altLang="en-US"/>
+          </a:p>
+        </p:txBody>
+      </p:sp>
+      <p:sp>
+        <p:nvSpPr>
+          <p:cNvPr id="58" name="椭圆 57"/>
+          <p:cNvSpPr/>
+          <p:nvPr/>
+        </p:nvSpPr>
+        <p:spPr>
+          <a:xfrm>
+            <a:off x="3065780" y="5180965"/>
+            <a:ext cx="226695" cy="198120"/>
+          </a:xfrm>
+          <a:prstGeom prst="ellipse">
+            <a:avLst/>
+          </a:prstGeom>
+          <a:ln>
+            <a:solidFill>
+              <a:schemeClr val="tx1"/>
+            </a:solidFill>
+          </a:ln>
+        </p:spPr>
+        <p:style>
+          <a:lnRef idx="2">
+            <a:schemeClr val="accent1"/>
+          </a:lnRef>
+          <a:fillRef idx="0">
+            <a:srgbClr val="FFFFFF"/>
+          </a:fillRef>
+          <a:effectRef idx="0">
+            <a:srgbClr val="FFFFFF"/>
+          </a:effectRef>
+          <a:fontRef idx="minor">
+            <a:schemeClr val="tx1"/>
+          </a:fontRef>
+        </p:style>
+        <p:txBody>
+          <a:bodyPr rtlCol="0" anchor="ctr"/>
+          <a:p>
+            <a:pPr algn="ctr"/>
+            <a:endParaRPr lang="zh-CN" altLang="en-US"/>
+          </a:p>
+        </p:txBody>
+      </p:sp>
+      <p:sp>
+        <p:nvSpPr>
+          <p:cNvPr id="59" name="椭圆 58"/>
+          <p:cNvSpPr/>
+          <p:nvPr/>
+        </p:nvSpPr>
+        <p:spPr>
+          <a:xfrm>
+            <a:off x="3056255" y="5635625"/>
+            <a:ext cx="226695" cy="198120"/>
+          </a:xfrm>
+          <a:prstGeom prst="ellipse">
+            <a:avLst/>
+          </a:prstGeom>
+          <a:ln>
+            <a:solidFill>
+              <a:schemeClr val="tx1"/>
+            </a:solidFill>
+          </a:ln>
+        </p:spPr>
+        <p:style>
+          <a:lnRef idx="2">
+            <a:schemeClr val="accent1"/>
+          </a:lnRef>
+          <a:fillRef idx="0">
+            <a:srgbClr val="FFFFFF"/>
+          </a:fillRef>
+          <a:effectRef idx="0">
+            <a:srgbClr val="FFFFFF"/>
+          </a:effectRef>
+          <a:fontRef idx="minor">
+            <a:schemeClr val="tx1"/>
+          </a:fontRef>
+        </p:style>
+        <p:txBody>
+          <a:bodyPr rtlCol="0" anchor="ctr"/>
+          <a:p>
+            <a:pPr algn="ctr"/>
+            <a:endParaRPr lang="zh-CN" altLang="en-US"/>
+          </a:p>
+        </p:txBody>
+      </p:sp>
+      <p:sp>
+        <p:nvSpPr>
+          <p:cNvPr id="60" name="椭圆 59"/>
+          <p:cNvSpPr/>
+          <p:nvPr/>
+        </p:nvSpPr>
+        <p:spPr>
+          <a:xfrm>
+            <a:off x="3056255" y="5408295"/>
+            <a:ext cx="226695" cy="198120"/>
+          </a:xfrm>
+          <a:prstGeom prst="ellipse">
+            <a:avLst/>
+          </a:prstGeom>
+          <a:ln>
+            <a:solidFill>
+              <a:schemeClr val="tx1"/>
+            </a:solidFill>
+          </a:ln>
+        </p:spPr>
+        <p:style>
+          <a:lnRef idx="2">
+            <a:schemeClr val="accent1"/>
+          </a:lnRef>
+          <a:fillRef idx="0">
+            <a:srgbClr val="FFFFFF"/>
+          </a:fillRef>
+          <a:effectRef idx="0">
+            <a:srgbClr val="FFFFFF"/>
+          </a:effectRef>
+          <a:fontRef idx="minor">
+            <a:schemeClr val="tx1"/>
+          </a:fontRef>
+        </p:style>
+        <p:txBody>
+          <a:bodyPr rtlCol="0" anchor="ctr"/>
+          <a:p>
+            <a:pPr algn="ctr"/>
+            <a:endParaRPr lang="zh-CN" altLang="en-US"/>
+          </a:p>
+        </p:txBody>
+      </p:sp>
+      <p:sp>
+        <p:nvSpPr>
+          <p:cNvPr id="61" name="减号 60"/>
+          <p:cNvSpPr/>
+          <p:nvPr/>
+        </p:nvSpPr>
+        <p:spPr>
+          <a:xfrm>
+            <a:off x="4599940" y="3558540"/>
+            <a:ext cx="193675" cy="193040"/>
+          </a:xfrm>
+          <a:prstGeom prst="mathMinus">
+            <a:avLst/>
+          </a:prstGeom>
+        </p:spPr>
+        <p:style>
+          <a:lnRef idx="2">
+            <a:schemeClr val="accent1">
+              <a:lumMod val="75000"/>
+            </a:schemeClr>
+          </a:lnRef>
+          <a:fillRef idx="1">
+            <a:schemeClr val="accent1"/>
+          </a:fillRef>
+          <a:effectRef idx="0">
+            <a:srgbClr val="FFFFFF"/>
+          </a:effectRef>
+          <a:fontRef idx="minor">
+            <a:schemeClr val="lt1"/>
+          </a:fontRef>
+        </p:style>
+        <p:txBody>
+          <a:bodyPr rtlCol="0" anchor="ctr"/>
+          <a:p>
+            <a:pPr algn="ctr"/>
+            <a:endParaRPr lang="zh-CN" altLang="en-US"/>
+          </a:p>
+        </p:txBody>
+      </p:sp>
+      <p:sp>
+        <p:nvSpPr>
+          <p:cNvPr id="62" name="等于号 61"/>
+          <p:cNvSpPr/>
+          <p:nvPr/>
+        </p:nvSpPr>
+        <p:spPr>
+          <a:xfrm>
+            <a:off x="4328160" y="3524250"/>
+            <a:ext cx="198755" cy="203835"/>
+          </a:xfrm>
+          <a:prstGeom prst="mathEqual">
+            <a:avLst/>
+          </a:prstGeom>
+          <a:solidFill>
+            <a:schemeClr val="tx1"/>
+          </a:solidFill>
+        </p:spPr>
+        <p:style>
+          <a:lnRef idx="2">
+            <a:schemeClr val="accent1">
+              <a:lumMod val="75000"/>
+            </a:schemeClr>
+          </a:lnRef>
+          <a:fillRef idx="1">
+            <a:schemeClr val="accent1"/>
+          </a:fillRef>
+          <a:effectRef idx="0">
+            <a:srgbClr val="FFFFFF"/>
+          </a:effectRef>
+          <a:fontRef idx="minor">
+            <a:schemeClr val="lt1"/>
+          </a:fontRef>
+        </p:style>
+        <p:txBody>
+          <a:bodyPr rtlCol="0" anchor="ctr"/>
+          <a:p>
+            <a:pPr algn="ctr"/>
+            <a:endParaRPr lang="zh-CN" altLang="en-US">
+              <a:solidFill>
+                <a:schemeClr val="tx1"/>
+              </a:solidFill>
+            </a:endParaRPr>
+          </a:p>
+        </p:txBody>
+      </p:sp>
+      <p:sp>
+        <p:nvSpPr>
+          <p:cNvPr id="63" name="等于号 62"/>
+          <p:cNvSpPr/>
+          <p:nvPr/>
+        </p:nvSpPr>
+        <p:spPr>
+          <a:xfrm>
+            <a:off x="4315460" y="3932555"/>
+            <a:ext cx="198755" cy="203835"/>
+          </a:xfrm>
+          <a:prstGeom prst="mathEqual">
+            <a:avLst/>
+          </a:prstGeom>
+          <a:solidFill>
+            <a:schemeClr val="tx1"/>
+          </a:solidFill>
+        </p:spPr>
+        <p:style>
+          <a:lnRef idx="2">
+            <a:schemeClr val="accent1">
+              <a:lumMod val="75000"/>
+            </a:schemeClr>
+          </a:lnRef>
+          <a:fillRef idx="1">
+            <a:schemeClr val="accent1"/>
+          </a:fillRef>
+          <a:effectRef idx="0">
+            <a:srgbClr val="FFFFFF"/>
+          </a:effectRef>
+          <a:fontRef idx="minor">
+            <a:schemeClr val="lt1"/>
+          </a:fontRef>
+        </p:style>
+        <p:txBody>
+          <a:bodyPr rtlCol="0" anchor="ctr"/>
+          <a:p>
+            <a:pPr algn="ctr"/>
+            <a:endParaRPr lang="zh-CN" altLang="en-US">
+              <a:solidFill>
+                <a:schemeClr val="tx1"/>
+              </a:solidFill>
+            </a:endParaRPr>
+          </a:p>
+        </p:txBody>
+      </p:sp>
+      <p:sp>
+        <p:nvSpPr>
+          <p:cNvPr id="64" name="等于号 63"/>
+          <p:cNvSpPr/>
+          <p:nvPr/>
+        </p:nvSpPr>
+        <p:spPr>
+          <a:xfrm>
+            <a:off x="4315460" y="4319905"/>
+            <a:ext cx="198755" cy="203835"/>
+          </a:xfrm>
+          <a:prstGeom prst="mathEqual">
+            <a:avLst/>
+          </a:prstGeom>
+          <a:solidFill>
+            <a:schemeClr val="tx1"/>
+          </a:solidFill>
+        </p:spPr>
+        <p:style>
+          <a:lnRef idx="2">
+            <a:schemeClr val="accent1">
+              <a:lumMod val="75000"/>
+            </a:schemeClr>
+          </a:lnRef>
+          <a:fillRef idx="1">
+            <a:schemeClr val="accent1"/>
+          </a:fillRef>
+          <a:effectRef idx="0">
+            <a:srgbClr val="FFFFFF"/>
+          </a:effectRef>
+          <a:fontRef idx="minor">
+            <a:schemeClr val="lt1"/>
+          </a:fontRef>
+        </p:style>
+        <p:txBody>
+          <a:bodyPr rtlCol="0" anchor="ctr"/>
+          <a:p>
+            <a:pPr algn="ctr"/>
+            <a:endParaRPr lang="zh-CN" altLang="en-US">
+              <a:solidFill>
+                <a:schemeClr val="tx1"/>
+              </a:solidFill>
+            </a:endParaRPr>
+          </a:p>
+        </p:txBody>
+      </p:sp>
+      <p:sp>
+        <p:nvSpPr>
+          <p:cNvPr id="65" name="圆角矩形 64"/>
+          <p:cNvSpPr/>
+          <p:nvPr/>
+        </p:nvSpPr>
+        <p:spPr>
+          <a:xfrm>
+            <a:off x="5192395" y="2571750"/>
+            <a:ext cx="1926590" cy="2743835"/>
+          </a:xfrm>
+          <a:prstGeom prst="roundRect">
+            <a:avLst/>
+          </a:prstGeom>
+        </p:spPr>
+        <p:style>
+          <a:lnRef idx="2">
+            <a:schemeClr val="accent1"/>
+          </a:lnRef>
+          <a:fillRef idx="0">
+            <a:srgbClr val="FFFFFF"/>
+          </a:fillRef>
+          <a:effectRef idx="0">
+            <a:srgbClr val="FFFFFF"/>
+          </a:effectRef>
+          <a:fontRef idx="minor">
+            <a:schemeClr val="tx1"/>
+          </a:fontRef>
+        </p:style>
+        <p:txBody>
+          <a:bodyPr rtlCol="0" anchor="ctr"/>
+          <a:p>
+            <a:pPr algn="ctr"/>
+            <a:endParaRPr lang="zh-CN" altLang="en-US"/>
+          </a:p>
+        </p:txBody>
+      </p:sp>
+      <p:pic>
+        <p:nvPicPr>
+          <p:cNvPr id="66" name="图片 65"/>
+          <p:cNvPicPr>
+            <a:picLocks noChangeAspect="1"/>
+          </p:cNvPicPr>
+          <p:nvPr/>
+        </p:nvPicPr>
+        <p:blipFill>
+          <a:blip r:embed="rId1"/>
+          <a:stretch>
+            <a:fillRect/>
+          </a:stretch>
+        </p:blipFill>
+        <p:spPr>
+          <a:xfrm>
+            <a:off x="5465445" y="2870200"/>
+            <a:ext cx="152400" cy="171450"/>
+          </a:xfrm>
+          <a:prstGeom prst="rect">
+            <a:avLst/>
+          </a:prstGeom>
+        </p:spPr>
+      </p:pic>
+      <p:cxnSp>
+        <p:nvCxnSpPr>
+          <p:cNvPr id="67" name="直接箭头连接符 66"/>
+          <p:cNvCxnSpPr/>
+          <p:nvPr/>
+        </p:nvCxnSpPr>
+        <p:spPr>
+          <a:xfrm flipV="1">
+            <a:off x="5664835" y="2944495"/>
+            <a:ext cx="674370" cy="9525"/>
+          </a:xfrm>
+          <a:prstGeom prst="straightConnector1">
+            <a:avLst/>
+          </a:prstGeom>
+          <a:ln>
+            <a:tailEnd type="arrow"/>
+          </a:ln>
+        </p:spPr>
+        <p:style>
+          <a:lnRef idx="2">
+            <a:schemeClr val="accent1"/>
+          </a:lnRef>
+          <a:fillRef idx="0">
+            <a:srgbClr val="FFFFFF"/>
+          </a:fillRef>
+          <a:effectRef idx="0">
+            <a:srgbClr val="FFFFFF"/>
+          </a:effectRef>
+          <a:fontRef idx="minor">
+            <a:schemeClr val="tx1"/>
+          </a:fontRef>
+        </p:style>
+      </p:cxnSp>
+      <p:sp>
+        <p:nvSpPr>
+          <p:cNvPr id="68" name="文本框 67"/>
+          <p:cNvSpPr txBox="1"/>
+          <p:nvPr/>
+        </p:nvSpPr>
+        <p:spPr>
+          <a:xfrm>
+            <a:off x="6386195" y="2726690"/>
+            <a:ext cx="918210" cy="368300"/>
+          </a:xfrm>
+          <a:prstGeom prst="rect">
+            <a:avLst/>
+          </a:prstGeom>
+          <a:noFill/>
+        </p:spPr>
+        <p:txBody>
+          <a:bodyPr wrap="square" rtlCol="0">
+            <a:spAutoFit/>
+          </a:bodyPr>
+          <a:p>
+            <a:r>
+              <a:rPr lang="zh-CN" altLang="en-US"/>
+              <a:t>开启</a:t>
+            </a:r>
+            <a:endParaRPr lang="zh-CN" altLang="en-US"/>
+          </a:p>
+        </p:txBody>
+      </p:sp>
+      <p:sp>
+        <p:nvSpPr>
+          <p:cNvPr id="69" name="矩形 68"/>
+          <p:cNvSpPr/>
+          <p:nvPr/>
+        </p:nvSpPr>
+        <p:spPr>
+          <a:xfrm>
+            <a:off x="5381625" y="3268980"/>
+            <a:ext cx="1529080" cy="1597025"/>
+          </a:xfrm>
+          <a:prstGeom prst="rect">
+            <a:avLst/>
+          </a:prstGeom>
+        </p:spPr>
+        <p:style>
+          <a:lnRef idx="2">
+            <a:schemeClr val="accent1"/>
+          </a:lnRef>
+          <a:fillRef idx="0">
+            <a:srgbClr val="FFFFFF"/>
+          </a:fillRef>
+          <a:effectRef idx="0">
+            <a:srgbClr val="FFFFFF"/>
+          </a:effectRef>
+          <a:fontRef idx="minor">
+            <a:schemeClr val="tx1"/>
+          </a:fontRef>
+        </p:style>
+        <p:txBody>
+          <a:bodyPr rtlCol="0" anchor="ctr"/>
+          <a:p>
+            <a:pPr algn="ctr"/>
+            <a:endParaRPr lang="zh-CN" altLang="en-US"/>
+          </a:p>
+        </p:txBody>
+      </p:sp>
+      <p:sp>
+        <p:nvSpPr>
+          <p:cNvPr id="70" name="文本框 69"/>
+          <p:cNvSpPr txBox="1"/>
+          <p:nvPr/>
+        </p:nvSpPr>
+        <p:spPr>
+          <a:xfrm>
+            <a:off x="5517515" y="3094990"/>
+            <a:ext cx="821690" cy="368300"/>
+          </a:xfrm>
+          <a:prstGeom prst="rect">
+            <a:avLst/>
+          </a:prstGeom>
+          <a:noFill/>
+        </p:spPr>
+        <p:txBody>
+          <a:bodyPr wrap="square" rtlCol="0">
+            <a:spAutoFit/>
+          </a:bodyPr>
+          <a:p>
+            <a:r>
+              <a:rPr lang="zh-CN" altLang="en-US"/>
+              <a:t>曲目</a:t>
+            </a:r>
+            <a:endParaRPr lang="zh-CN" altLang="en-US"/>
+          </a:p>
+        </p:txBody>
+      </p:sp>
+      <p:graphicFrame>
+        <p:nvGraphicFramePr>
+          <p:cNvPr id="71" name="表格 70"/>
+          <p:cNvGraphicFramePr/>
+          <p:nvPr>
+            <p:custDataLst>
+              <p:tags r:id="rId4"/>
+            </p:custDataLst>
+          </p:nvPr>
+        </p:nvGraphicFramePr>
+        <p:xfrm>
+          <a:off x="5376545" y="3463290"/>
+          <a:ext cx="1534795" cy="1143000"/>
+        </p:xfrm>
+        <a:graphic>
+          <a:graphicData uri="http://schemas.openxmlformats.org/drawingml/2006/table">
+            <a:tbl>
+              <a:tblPr firstRow="1" bandRow="1">
+                <a:tableStyleId>{5C22544A-7EE6-4342-B048-85BDC9FD1C3A}</a:tableStyleId>
+              </a:tblPr>
+              <a:tblGrid>
+                <a:gridCol w="1534795"/>
+              </a:tblGrid>
+              <a:tr h="381000">
+                <a:tc>
+                  <a:txBody>
+                    <a:bodyPr/>
+                    <a:p>
+                      <a:pPr>
+                        <a:buNone/>
+                      </a:pPr>
+                      <a:r>
+                        <a:rPr lang="en-US" altLang="zh-CN"/>
+                        <a:t>AA</a:t>
+                      </a:r>
+                      <a:endParaRPr lang="en-US" altLang="zh-CN"/>
+                    </a:p>
+                  </a:txBody>
+                  <a:tcPr/>
+                </a:tc>
+              </a:tr>
+              <a:tr h="381000">
+                <a:tc>
+                  <a:txBody>
+                    <a:bodyPr/>
+                    <a:p>
+                      <a:pPr>
+                        <a:buNone/>
+                      </a:pPr>
+                      <a:r>
+                        <a:rPr lang="en-US" altLang="zh-CN"/>
+                        <a:t>BB</a:t>
+                      </a:r>
+                      <a:endParaRPr lang="en-US" altLang="zh-CN"/>
+                    </a:p>
+                  </a:txBody>
+                  <a:tcPr/>
+                </a:tc>
+              </a:tr>
+              <a:tr h="381000">
+                <a:tc>
+                  <a:txBody>
+                    <a:bodyPr/>
+                    <a:p>
+                      <a:pPr>
+                        <a:buNone/>
+                      </a:pPr>
+                      <a:r>
+                        <a:rPr lang="en-US" altLang="zh-CN"/>
+                        <a:t>CC</a:t>
+                      </a:r>
+                      <a:endParaRPr lang="en-US" altLang="zh-CN"/>
+                    </a:p>
+                  </a:txBody>
+                  <a:tcPr/>
+                </a:tc>
+              </a:tr>
+            </a:tbl>
+          </a:graphicData>
+        </a:graphic>
+      </p:graphicFrame>
+      <p:sp>
+        <p:nvSpPr>
+          <p:cNvPr id="72" name="圆角矩形 71"/>
+          <p:cNvSpPr/>
+          <p:nvPr/>
+        </p:nvSpPr>
+        <p:spPr>
+          <a:xfrm>
+            <a:off x="5381625" y="5115560"/>
+            <a:ext cx="1513840" cy="805815"/>
+          </a:xfrm>
+          <a:prstGeom prst="roundRect">
+            <a:avLst/>
+          </a:prstGeom>
+        </p:spPr>
+        <p:style>
+          <a:lnRef idx="2">
+            <a:schemeClr val="accent1">
+              <a:lumMod val="75000"/>
+            </a:schemeClr>
+          </a:lnRef>
+          <a:fillRef idx="1">
+            <a:schemeClr val="accent1"/>
+          </a:fillRef>
+          <a:effectRef idx="0">
+            <a:srgbClr val="FFFFFF"/>
+          </a:effectRef>
+          <a:fontRef idx="minor">
+            <a:schemeClr val="lt1"/>
+          </a:fontRef>
+        </p:style>
+        <p:txBody>
+          <a:bodyPr rtlCol="0" anchor="ctr"/>
+          <a:p>
+            <a:pPr algn="ctr"/>
+            <a:r>
+              <a:rPr lang="zh-CN" altLang="en-US"/>
+              <a:t>随机播放</a:t>
+            </a:r>
+            <a:endParaRPr lang="zh-CN" altLang="en-US"/>
+          </a:p>
+          <a:p>
+            <a:pPr algn="ctr"/>
+            <a:r>
+              <a:rPr lang="zh-CN" altLang="en-US"/>
+              <a:t>顺序播放</a:t>
+            </a:r>
+            <a:endParaRPr lang="zh-CN" altLang="en-US"/>
+          </a:p>
+          <a:p>
+            <a:pPr algn="ctr"/>
+            <a:r>
+              <a:rPr lang="zh-CN" altLang="en-US"/>
+              <a:t>单曲循环</a:t>
+            </a:r>
+            <a:endParaRPr lang="zh-CN" altLang="en-US"/>
+          </a:p>
+        </p:txBody>
+      </p:sp>
+      <p:sp>
+        <p:nvSpPr>
+          <p:cNvPr id="73" name="文本框 72"/>
+          <p:cNvSpPr txBox="1"/>
+          <p:nvPr/>
+        </p:nvSpPr>
+        <p:spPr>
+          <a:xfrm>
+            <a:off x="5376545" y="4497705"/>
+            <a:ext cx="1463040" cy="368300"/>
+          </a:xfrm>
+          <a:prstGeom prst="rect">
+            <a:avLst/>
+          </a:prstGeom>
+          <a:noFill/>
+        </p:spPr>
+        <p:txBody>
+          <a:bodyPr wrap="square" rtlCol="0">
+            <a:spAutoFit/>
+          </a:bodyPr>
+          <a:p>
+            <a:r>
+              <a:rPr lang="en-US" altLang="zh-CN"/>
+              <a:t>+</a:t>
+            </a:r>
+            <a:endParaRPr lang="en-US" altLang="zh-CN"/>
+          </a:p>
+        </p:txBody>
+      </p:sp>
+      <p:sp>
+        <p:nvSpPr>
+          <p:cNvPr id="74" name="椭圆 73"/>
+          <p:cNvSpPr/>
+          <p:nvPr/>
+        </p:nvSpPr>
+        <p:spPr>
+          <a:xfrm>
+            <a:off x="5429885" y="4619625"/>
+            <a:ext cx="226695" cy="198120"/>
+          </a:xfrm>
+          <a:prstGeom prst="ellipse">
+            <a:avLst/>
+          </a:prstGeom>
+        </p:spPr>
+        <p:style>
+          <a:lnRef idx="2">
+            <a:schemeClr val="accent1"/>
+          </a:lnRef>
+          <a:fillRef idx="0">
+            <a:srgbClr val="FFFFFF"/>
+          </a:fillRef>
+          <a:effectRef idx="0">
+            <a:srgbClr val="FFFFFF"/>
+          </a:effectRef>
+          <a:fontRef idx="minor">
+            <a:schemeClr val="tx1"/>
+          </a:fontRef>
+        </p:style>
+        <p:txBody>
+          <a:bodyPr rtlCol="0" anchor="ctr"/>
+          <a:p>
+            <a:pPr algn="ctr"/>
+            <a:endParaRPr lang="zh-CN" altLang="en-US"/>
+          </a:p>
+        </p:txBody>
+      </p:sp>
+      <p:sp>
+        <p:nvSpPr>
+          <p:cNvPr id="75" name="椭圆 74"/>
+          <p:cNvSpPr/>
+          <p:nvPr/>
+        </p:nvSpPr>
+        <p:spPr>
+          <a:xfrm>
+            <a:off x="5391150" y="5180965"/>
+            <a:ext cx="226695" cy="198120"/>
+          </a:xfrm>
+          <a:prstGeom prst="ellipse">
+            <a:avLst/>
+          </a:prstGeom>
+          <a:ln>
+            <a:solidFill>
+              <a:schemeClr val="tx1"/>
+            </a:solidFill>
+          </a:ln>
+        </p:spPr>
+        <p:style>
+          <a:lnRef idx="2">
+            <a:schemeClr val="accent1"/>
+          </a:lnRef>
+          <a:fillRef idx="0">
+            <a:srgbClr val="FFFFFF"/>
+          </a:fillRef>
+          <a:effectRef idx="0">
+            <a:srgbClr val="FFFFFF"/>
+          </a:effectRef>
+          <a:fontRef idx="minor">
+            <a:schemeClr val="tx1"/>
+          </a:fontRef>
+        </p:style>
+        <p:txBody>
+          <a:bodyPr rtlCol="0" anchor="ctr"/>
+          <a:p>
+            <a:pPr algn="ctr"/>
+            <a:endParaRPr lang="zh-CN" altLang="en-US"/>
+          </a:p>
+        </p:txBody>
+      </p:sp>
+      <p:sp>
+        <p:nvSpPr>
+          <p:cNvPr id="76" name="椭圆 75"/>
+          <p:cNvSpPr/>
+          <p:nvPr/>
+        </p:nvSpPr>
+        <p:spPr>
+          <a:xfrm>
+            <a:off x="5381625" y="5635625"/>
+            <a:ext cx="226695" cy="198120"/>
+          </a:xfrm>
+          <a:prstGeom prst="ellipse">
+            <a:avLst/>
+          </a:prstGeom>
+          <a:ln>
+            <a:solidFill>
+              <a:schemeClr val="tx1"/>
+            </a:solidFill>
+          </a:ln>
+        </p:spPr>
+        <p:style>
+          <a:lnRef idx="2">
+            <a:schemeClr val="accent1"/>
+          </a:lnRef>
+          <a:fillRef idx="0">
+            <a:srgbClr val="FFFFFF"/>
+          </a:fillRef>
+          <a:effectRef idx="0">
+            <a:srgbClr val="FFFFFF"/>
+          </a:effectRef>
+          <a:fontRef idx="minor">
+            <a:schemeClr val="tx1"/>
+          </a:fontRef>
+        </p:style>
+        <p:txBody>
+          <a:bodyPr rtlCol="0" anchor="ctr"/>
+          <a:p>
+            <a:pPr algn="ctr"/>
+            <a:endParaRPr lang="zh-CN" altLang="en-US"/>
+          </a:p>
+        </p:txBody>
+      </p:sp>
+      <p:sp>
+        <p:nvSpPr>
+          <p:cNvPr id="77" name="椭圆 76"/>
+          <p:cNvSpPr/>
+          <p:nvPr/>
+        </p:nvSpPr>
+        <p:spPr>
+          <a:xfrm>
+            <a:off x="5381625" y="5408295"/>
+            <a:ext cx="226695" cy="198120"/>
+          </a:xfrm>
+          <a:prstGeom prst="ellipse">
+            <a:avLst/>
+          </a:prstGeom>
+          <a:ln>
+            <a:solidFill>
+              <a:schemeClr val="tx1"/>
+            </a:solidFill>
+          </a:ln>
+        </p:spPr>
+        <p:style>
+          <a:lnRef idx="2">
+            <a:schemeClr val="accent1"/>
+          </a:lnRef>
+          <a:fillRef idx="0">
+            <a:srgbClr val="FFFFFF"/>
+          </a:fillRef>
+          <a:effectRef idx="0">
+            <a:srgbClr val="FFFFFF"/>
+          </a:effectRef>
+          <a:fontRef idx="minor">
+            <a:schemeClr val="tx1"/>
+          </a:fontRef>
+        </p:style>
+        <p:txBody>
+          <a:bodyPr rtlCol="0" anchor="ctr"/>
+          <a:p>
+            <a:pPr algn="ctr"/>
+            <a:endParaRPr lang="zh-CN" altLang="en-US"/>
+          </a:p>
+        </p:txBody>
+      </p:sp>
+      <p:sp>
+        <p:nvSpPr>
+          <p:cNvPr id="78" name="减号 77"/>
+          <p:cNvSpPr/>
+          <p:nvPr/>
+        </p:nvSpPr>
+        <p:spPr>
+          <a:xfrm>
+            <a:off x="6925310" y="3558540"/>
+            <a:ext cx="193675" cy="193040"/>
+          </a:xfrm>
+          <a:prstGeom prst="mathMinus">
+            <a:avLst/>
+          </a:prstGeom>
+        </p:spPr>
+        <p:style>
+          <a:lnRef idx="2">
+            <a:schemeClr val="accent1">
+              <a:lumMod val="75000"/>
+            </a:schemeClr>
+          </a:lnRef>
+          <a:fillRef idx="1">
+            <a:schemeClr val="accent1"/>
+          </a:fillRef>
+          <a:effectRef idx="0">
+            <a:srgbClr val="FFFFFF"/>
+          </a:effectRef>
+          <a:fontRef idx="minor">
+            <a:schemeClr val="lt1"/>
+          </a:fontRef>
+        </p:style>
+        <p:txBody>
+          <a:bodyPr rtlCol="0" anchor="ctr"/>
+          <a:p>
+            <a:pPr algn="ctr"/>
+            <a:endParaRPr lang="zh-CN" altLang="en-US"/>
+          </a:p>
+        </p:txBody>
+      </p:sp>
+      <p:sp>
+        <p:nvSpPr>
+          <p:cNvPr id="79" name="等于号 78"/>
+          <p:cNvSpPr/>
+          <p:nvPr/>
+        </p:nvSpPr>
+        <p:spPr>
+          <a:xfrm>
+            <a:off x="6653530" y="3524250"/>
+            <a:ext cx="198755" cy="203835"/>
+          </a:xfrm>
+          <a:prstGeom prst="mathEqual">
+            <a:avLst/>
+          </a:prstGeom>
+          <a:solidFill>
+            <a:schemeClr val="tx1"/>
+          </a:solidFill>
+        </p:spPr>
+        <p:style>
+          <a:lnRef idx="2">
+            <a:schemeClr val="accent1">
+              <a:lumMod val="75000"/>
+            </a:schemeClr>
+          </a:lnRef>
+          <a:fillRef idx="1">
+            <a:schemeClr val="accent1"/>
+          </a:fillRef>
+          <a:effectRef idx="0">
+            <a:srgbClr val="FFFFFF"/>
+          </a:effectRef>
+          <a:fontRef idx="minor">
+            <a:schemeClr val="lt1"/>
+          </a:fontRef>
+        </p:style>
+        <p:txBody>
+          <a:bodyPr rtlCol="0" anchor="ctr"/>
+          <a:p>
+            <a:pPr algn="ctr"/>
+            <a:endParaRPr lang="zh-CN" altLang="en-US">
+              <a:solidFill>
+                <a:schemeClr val="tx1"/>
+              </a:solidFill>
+            </a:endParaRPr>
+          </a:p>
+        </p:txBody>
+      </p:sp>
+      <p:sp>
+        <p:nvSpPr>
+          <p:cNvPr id="80" name="等于号 79"/>
+          <p:cNvSpPr/>
+          <p:nvPr/>
+        </p:nvSpPr>
+        <p:spPr>
+          <a:xfrm>
+            <a:off x="6640830" y="3932555"/>
+            <a:ext cx="198755" cy="203835"/>
+          </a:xfrm>
+          <a:prstGeom prst="mathEqual">
+            <a:avLst/>
+          </a:prstGeom>
+          <a:solidFill>
+            <a:schemeClr val="tx1"/>
+          </a:solidFill>
+        </p:spPr>
+        <p:style>
+          <a:lnRef idx="2">
+            <a:schemeClr val="accent1">
+              <a:lumMod val="75000"/>
+            </a:schemeClr>
+          </a:lnRef>
+          <a:fillRef idx="1">
+            <a:schemeClr val="accent1"/>
+          </a:fillRef>
+          <a:effectRef idx="0">
+            <a:srgbClr val="FFFFFF"/>
+          </a:effectRef>
+          <a:fontRef idx="minor">
+            <a:schemeClr val="lt1"/>
+          </a:fontRef>
+        </p:style>
+        <p:txBody>
+          <a:bodyPr rtlCol="0" anchor="ctr"/>
+          <a:p>
+            <a:pPr algn="ctr"/>
+            <a:endParaRPr lang="zh-CN" altLang="en-US">
+              <a:solidFill>
+                <a:schemeClr val="tx1"/>
+              </a:solidFill>
+            </a:endParaRPr>
+          </a:p>
+        </p:txBody>
+      </p:sp>
+      <p:sp>
+        <p:nvSpPr>
+          <p:cNvPr id="81" name="等于号 80"/>
+          <p:cNvSpPr/>
+          <p:nvPr/>
+        </p:nvSpPr>
+        <p:spPr>
+          <a:xfrm>
+            <a:off x="6640830" y="4319905"/>
+            <a:ext cx="198755" cy="203835"/>
+          </a:xfrm>
+          <a:prstGeom prst="mathEqual">
+            <a:avLst/>
+          </a:prstGeom>
+          <a:solidFill>
+            <a:schemeClr val="tx1"/>
+          </a:solidFill>
+        </p:spPr>
+        <p:style>
+          <a:lnRef idx="2">
+            <a:schemeClr val="accent1">
+              <a:lumMod val="75000"/>
+            </a:schemeClr>
+          </a:lnRef>
+          <a:fillRef idx="1">
+            <a:schemeClr val="accent1"/>
+          </a:fillRef>
+          <a:effectRef idx="0">
+            <a:srgbClr val="FFFFFF"/>
+          </a:effectRef>
+          <a:fontRef idx="minor">
+            <a:schemeClr val="lt1"/>
+          </a:fontRef>
+        </p:style>
+        <p:txBody>
+          <a:bodyPr rtlCol="0" anchor="ctr"/>
+          <a:p>
+            <a:pPr algn="ctr"/>
+            <a:endParaRPr lang="zh-CN" altLang="en-US">
+              <a:solidFill>
+                <a:schemeClr val="tx1"/>
+              </a:solidFill>
+            </a:endParaRPr>
+          </a:p>
+        </p:txBody>
+      </p:sp>
+      <p:sp>
+        <p:nvSpPr>
+          <p:cNvPr id="82" name="圆角矩形 81"/>
+          <p:cNvSpPr/>
+          <p:nvPr/>
+        </p:nvSpPr>
+        <p:spPr>
+          <a:xfrm>
+            <a:off x="7489190" y="2537460"/>
+            <a:ext cx="1926590" cy="2743835"/>
+          </a:xfrm>
+          <a:prstGeom prst="roundRect">
+            <a:avLst/>
+          </a:prstGeom>
+        </p:spPr>
+        <p:style>
+          <a:lnRef idx="2">
+            <a:schemeClr val="accent1"/>
+          </a:lnRef>
+          <a:fillRef idx="0">
+            <a:srgbClr val="FFFFFF"/>
+          </a:fillRef>
+          <a:effectRef idx="0">
+            <a:srgbClr val="FFFFFF"/>
+          </a:effectRef>
+          <a:fontRef idx="minor">
+            <a:schemeClr val="tx1"/>
+          </a:fontRef>
+        </p:style>
+        <p:txBody>
+          <a:bodyPr rtlCol="0" anchor="ctr"/>
+          <a:p>
+            <a:pPr algn="ctr"/>
+            <a:endParaRPr lang="zh-CN" altLang="en-US"/>
+          </a:p>
+        </p:txBody>
+      </p:sp>
+      <p:pic>
+        <p:nvPicPr>
+          <p:cNvPr id="83" name="图片 82"/>
+          <p:cNvPicPr>
+            <a:picLocks noChangeAspect="1"/>
+          </p:cNvPicPr>
+          <p:nvPr/>
+        </p:nvPicPr>
+        <p:blipFill>
+          <a:blip r:embed="rId1"/>
+          <a:stretch>
+            <a:fillRect/>
+          </a:stretch>
+        </p:blipFill>
+        <p:spPr>
+          <a:xfrm>
+            <a:off x="7762240" y="2835910"/>
+            <a:ext cx="152400" cy="171450"/>
+          </a:xfrm>
+          <a:prstGeom prst="rect">
+            <a:avLst/>
+          </a:prstGeom>
+        </p:spPr>
+      </p:pic>
+      <p:cxnSp>
+        <p:nvCxnSpPr>
+          <p:cNvPr id="84" name="直接箭头连接符 83"/>
+          <p:cNvCxnSpPr/>
+          <p:nvPr/>
+        </p:nvCxnSpPr>
+        <p:spPr>
+          <a:xfrm flipV="1">
+            <a:off x="7961630" y="2910205"/>
+            <a:ext cx="674370" cy="9525"/>
+          </a:xfrm>
+          <a:prstGeom prst="straightConnector1">
+            <a:avLst/>
+          </a:prstGeom>
+          <a:ln>
+            <a:tailEnd type="arrow"/>
+          </a:ln>
+        </p:spPr>
+        <p:style>
+          <a:lnRef idx="2">
+            <a:schemeClr val="accent1"/>
+          </a:lnRef>
+          <a:fillRef idx="0">
+            <a:srgbClr val="FFFFFF"/>
+          </a:fillRef>
+          <a:effectRef idx="0">
+            <a:srgbClr val="FFFFFF"/>
+          </a:effectRef>
+          <a:fontRef idx="minor">
+            <a:schemeClr val="tx1"/>
+          </a:fontRef>
+        </p:style>
+      </p:cxnSp>
+      <p:sp>
+        <p:nvSpPr>
+          <p:cNvPr id="85" name="文本框 84"/>
+          <p:cNvSpPr txBox="1"/>
+          <p:nvPr/>
+        </p:nvSpPr>
+        <p:spPr>
+          <a:xfrm>
+            <a:off x="8682990" y="2692400"/>
+            <a:ext cx="918210" cy="368300"/>
+          </a:xfrm>
+          <a:prstGeom prst="rect">
+            <a:avLst/>
+          </a:prstGeom>
+          <a:noFill/>
+        </p:spPr>
+        <p:txBody>
+          <a:bodyPr wrap="square" rtlCol="0">
+            <a:spAutoFit/>
+          </a:bodyPr>
+          <a:p>
+            <a:r>
+              <a:rPr lang="zh-CN" altLang="en-US"/>
+              <a:t>开启</a:t>
+            </a:r>
+            <a:endParaRPr lang="zh-CN" altLang="en-US"/>
+          </a:p>
+        </p:txBody>
+      </p:sp>
+      <p:sp>
+        <p:nvSpPr>
+          <p:cNvPr id="86" name="矩形 85"/>
+          <p:cNvSpPr/>
+          <p:nvPr/>
+        </p:nvSpPr>
+        <p:spPr>
+          <a:xfrm>
+            <a:off x="7678420" y="3234690"/>
+            <a:ext cx="1529080" cy="1597025"/>
+          </a:xfrm>
+          <a:prstGeom prst="rect">
+            <a:avLst/>
+          </a:prstGeom>
+        </p:spPr>
+        <p:style>
+          <a:lnRef idx="2">
+            <a:schemeClr val="accent1"/>
+          </a:lnRef>
+          <a:fillRef idx="0">
+            <a:srgbClr val="FFFFFF"/>
+          </a:fillRef>
+          <a:effectRef idx="0">
+            <a:srgbClr val="FFFFFF"/>
+          </a:effectRef>
+          <a:fontRef idx="minor">
+            <a:schemeClr val="tx1"/>
+          </a:fontRef>
+        </p:style>
+        <p:txBody>
+          <a:bodyPr rtlCol="0" anchor="ctr"/>
+          <a:p>
+            <a:pPr algn="ctr"/>
+            <a:endParaRPr lang="zh-CN" altLang="en-US"/>
+          </a:p>
+        </p:txBody>
+      </p:sp>
+      <p:sp>
+        <p:nvSpPr>
+          <p:cNvPr id="87" name="文本框 86"/>
+          <p:cNvSpPr txBox="1"/>
+          <p:nvPr/>
+        </p:nvSpPr>
+        <p:spPr>
+          <a:xfrm>
+            <a:off x="7814310" y="3060700"/>
+            <a:ext cx="821690" cy="368300"/>
+          </a:xfrm>
+          <a:prstGeom prst="rect">
+            <a:avLst/>
+          </a:prstGeom>
+          <a:noFill/>
+        </p:spPr>
+        <p:txBody>
+          <a:bodyPr wrap="square" rtlCol="0">
+            <a:spAutoFit/>
+          </a:bodyPr>
+          <a:p>
+            <a:r>
+              <a:rPr lang="zh-CN" altLang="en-US"/>
+              <a:t>曲目</a:t>
+            </a:r>
+            <a:endParaRPr lang="zh-CN" altLang="en-US"/>
+          </a:p>
+        </p:txBody>
+      </p:sp>
+      <p:graphicFrame>
+        <p:nvGraphicFramePr>
+          <p:cNvPr id="88" name="表格 87"/>
+          <p:cNvGraphicFramePr/>
+          <p:nvPr>
+            <p:custDataLst>
+              <p:tags r:id="rId5"/>
+            </p:custDataLst>
+          </p:nvPr>
+        </p:nvGraphicFramePr>
+        <p:xfrm>
+          <a:off x="7673340" y="3429000"/>
+          <a:ext cx="1534795" cy="1143000"/>
+        </p:xfrm>
+        <a:graphic>
+          <a:graphicData uri="http://schemas.openxmlformats.org/drawingml/2006/table">
+            <a:tbl>
+              <a:tblPr firstRow="1" bandRow="1">
+                <a:tableStyleId>{5C22544A-7EE6-4342-B048-85BDC9FD1C3A}</a:tableStyleId>
+              </a:tblPr>
+              <a:tblGrid>
+                <a:gridCol w="1534795"/>
+              </a:tblGrid>
+              <a:tr h="381000">
+                <a:tc>
+                  <a:txBody>
+                    <a:bodyPr/>
+                    <a:p>
+                      <a:pPr>
+                        <a:buNone/>
+                      </a:pPr>
+                      <a:r>
+                        <a:rPr lang="en-US" altLang="zh-CN"/>
+                        <a:t>AA</a:t>
+                      </a:r>
+                      <a:endParaRPr lang="en-US" altLang="zh-CN"/>
+                    </a:p>
+                  </a:txBody>
+                  <a:tcPr/>
+                </a:tc>
+              </a:tr>
+              <a:tr h="381000">
+                <a:tc>
+                  <a:txBody>
+                    <a:bodyPr/>
+                    <a:p>
+                      <a:pPr>
+                        <a:buNone/>
+                      </a:pPr>
+                      <a:r>
+                        <a:rPr lang="en-US" altLang="zh-CN"/>
+                        <a:t>BB</a:t>
+                      </a:r>
+                      <a:endParaRPr lang="en-US" altLang="zh-CN"/>
+                    </a:p>
+                  </a:txBody>
+                  <a:tcPr/>
+                </a:tc>
+              </a:tr>
+              <a:tr h="381000">
+                <a:tc>
+                  <a:txBody>
+                    <a:bodyPr/>
+                    <a:p>
+                      <a:pPr>
+                        <a:buNone/>
+                      </a:pPr>
+                      <a:r>
+                        <a:rPr lang="en-US" altLang="zh-CN"/>
+                        <a:t>CC</a:t>
+                      </a:r>
+                      <a:endParaRPr lang="en-US" altLang="zh-CN"/>
+                    </a:p>
+                  </a:txBody>
+                  <a:tcPr/>
+                </a:tc>
+              </a:tr>
+            </a:tbl>
+          </a:graphicData>
+        </a:graphic>
+      </p:graphicFrame>
+      <p:sp>
+        <p:nvSpPr>
+          <p:cNvPr id="89" name="圆角矩形 88"/>
+          <p:cNvSpPr/>
+          <p:nvPr/>
+        </p:nvSpPr>
+        <p:spPr>
+          <a:xfrm>
+            <a:off x="7678420" y="5081270"/>
+            <a:ext cx="1513840" cy="805815"/>
+          </a:xfrm>
+          <a:prstGeom prst="roundRect">
+            <a:avLst/>
+          </a:prstGeom>
+        </p:spPr>
+        <p:style>
+          <a:lnRef idx="2">
+            <a:schemeClr val="accent1">
+              <a:lumMod val="75000"/>
+            </a:schemeClr>
+          </a:lnRef>
+          <a:fillRef idx="1">
+            <a:schemeClr val="accent1"/>
+          </a:fillRef>
+          <a:effectRef idx="0">
+            <a:srgbClr val="FFFFFF"/>
+          </a:effectRef>
+          <a:fontRef idx="minor">
+            <a:schemeClr val="lt1"/>
+          </a:fontRef>
+        </p:style>
+        <p:txBody>
+          <a:bodyPr rtlCol="0" anchor="ctr"/>
+          <a:p>
+            <a:pPr algn="ctr"/>
+            <a:r>
+              <a:rPr lang="zh-CN" altLang="en-US"/>
+              <a:t>随机播放</a:t>
+            </a:r>
+            <a:endParaRPr lang="zh-CN" altLang="en-US"/>
+          </a:p>
+          <a:p>
+            <a:pPr algn="ctr"/>
+            <a:r>
+              <a:rPr lang="zh-CN" altLang="en-US"/>
+              <a:t>顺序播放</a:t>
+            </a:r>
+            <a:endParaRPr lang="zh-CN" altLang="en-US"/>
+          </a:p>
+          <a:p>
+            <a:pPr algn="ctr"/>
+            <a:r>
+              <a:rPr lang="zh-CN" altLang="en-US"/>
+              <a:t>单曲循环</a:t>
+            </a:r>
+            <a:endParaRPr lang="zh-CN" altLang="en-US"/>
+          </a:p>
+        </p:txBody>
+      </p:sp>
+      <p:sp>
+        <p:nvSpPr>
+          <p:cNvPr id="90" name="文本框 89"/>
+          <p:cNvSpPr txBox="1"/>
+          <p:nvPr/>
+        </p:nvSpPr>
+        <p:spPr>
+          <a:xfrm>
+            <a:off x="7673340" y="4463415"/>
+            <a:ext cx="1463040" cy="368300"/>
+          </a:xfrm>
+          <a:prstGeom prst="rect">
+            <a:avLst/>
+          </a:prstGeom>
+          <a:noFill/>
+        </p:spPr>
+        <p:txBody>
+          <a:bodyPr wrap="square" rtlCol="0">
+            <a:spAutoFit/>
+          </a:bodyPr>
+          <a:p>
+            <a:r>
+              <a:rPr lang="en-US" altLang="zh-CN"/>
+              <a:t>+</a:t>
+            </a:r>
+            <a:endParaRPr lang="en-US" altLang="zh-CN"/>
+          </a:p>
+        </p:txBody>
+      </p:sp>
+      <p:sp>
+        <p:nvSpPr>
+          <p:cNvPr id="91" name="椭圆 90"/>
+          <p:cNvSpPr/>
+          <p:nvPr/>
+        </p:nvSpPr>
+        <p:spPr>
+          <a:xfrm>
+            <a:off x="7726680" y="4585335"/>
+            <a:ext cx="226695" cy="198120"/>
+          </a:xfrm>
+          <a:prstGeom prst="ellipse">
+            <a:avLst/>
+          </a:prstGeom>
+        </p:spPr>
+        <p:style>
+          <a:lnRef idx="2">
+            <a:schemeClr val="accent1"/>
+          </a:lnRef>
+          <a:fillRef idx="0">
+            <a:srgbClr val="FFFFFF"/>
+          </a:fillRef>
+          <a:effectRef idx="0">
+            <a:srgbClr val="FFFFFF"/>
+          </a:effectRef>
+          <a:fontRef idx="minor">
+            <a:schemeClr val="tx1"/>
+          </a:fontRef>
+        </p:style>
+        <p:txBody>
+          <a:bodyPr rtlCol="0" anchor="ctr"/>
+          <a:p>
+            <a:pPr algn="ctr"/>
+            <a:endParaRPr lang="zh-CN" altLang="en-US"/>
+          </a:p>
+        </p:txBody>
+      </p:sp>
+      <p:sp>
+        <p:nvSpPr>
+          <p:cNvPr id="92" name="椭圆 91"/>
+          <p:cNvSpPr/>
+          <p:nvPr/>
+        </p:nvSpPr>
+        <p:spPr>
+          <a:xfrm>
+            <a:off x="7687945" y="5146675"/>
+            <a:ext cx="226695" cy="198120"/>
+          </a:xfrm>
+          <a:prstGeom prst="ellipse">
+            <a:avLst/>
+          </a:prstGeom>
+          <a:ln>
+            <a:solidFill>
+              <a:schemeClr val="tx1"/>
+            </a:solidFill>
+          </a:ln>
+        </p:spPr>
+        <p:style>
+          <a:lnRef idx="2">
+            <a:schemeClr val="accent1"/>
+          </a:lnRef>
+          <a:fillRef idx="0">
+            <a:srgbClr val="FFFFFF"/>
+          </a:fillRef>
+          <a:effectRef idx="0">
+            <a:srgbClr val="FFFFFF"/>
+          </a:effectRef>
+          <a:fontRef idx="minor">
+            <a:schemeClr val="tx1"/>
+          </a:fontRef>
+        </p:style>
+        <p:txBody>
+          <a:bodyPr rtlCol="0" anchor="ctr"/>
+          <a:p>
+            <a:pPr algn="ctr"/>
+            <a:endParaRPr lang="zh-CN" altLang="en-US"/>
+          </a:p>
+        </p:txBody>
+      </p:sp>
+      <p:sp>
+        <p:nvSpPr>
+          <p:cNvPr id="93" name="椭圆 92"/>
+          <p:cNvSpPr/>
+          <p:nvPr/>
+        </p:nvSpPr>
+        <p:spPr>
+          <a:xfrm>
+            <a:off x="7678420" y="5601335"/>
+            <a:ext cx="226695" cy="198120"/>
+          </a:xfrm>
+          <a:prstGeom prst="ellipse">
+            <a:avLst/>
+          </a:prstGeom>
+          <a:ln>
+            <a:solidFill>
+              <a:schemeClr val="tx1"/>
+            </a:solidFill>
+          </a:ln>
+        </p:spPr>
+        <p:style>
+          <a:lnRef idx="2">
+            <a:schemeClr val="accent1"/>
+          </a:lnRef>
+          <a:fillRef idx="0">
+            <a:srgbClr val="FFFFFF"/>
+          </a:fillRef>
+          <a:effectRef idx="0">
+            <a:srgbClr val="FFFFFF"/>
+          </a:effectRef>
+          <a:fontRef idx="minor">
+            <a:schemeClr val="tx1"/>
+          </a:fontRef>
+        </p:style>
+        <p:txBody>
+          <a:bodyPr rtlCol="0" anchor="ctr"/>
+          <a:p>
+            <a:pPr algn="ctr"/>
+            <a:endParaRPr lang="zh-CN" altLang="en-US"/>
+          </a:p>
+        </p:txBody>
+      </p:sp>
+      <p:sp>
+        <p:nvSpPr>
+          <p:cNvPr id="94" name="椭圆 93"/>
+          <p:cNvSpPr/>
+          <p:nvPr/>
+        </p:nvSpPr>
+        <p:spPr>
+          <a:xfrm>
+            <a:off x="7678420" y="5374005"/>
+            <a:ext cx="226695" cy="198120"/>
+          </a:xfrm>
+          <a:prstGeom prst="ellipse">
+            <a:avLst/>
+          </a:prstGeom>
+          <a:ln>
+            <a:solidFill>
+              <a:schemeClr val="tx1"/>
+            </a:solidFill>
+          </a:ln>
+        </p:spPr>
+        <p:style>
+          <a:lnRef idx="2">
+            <a:schemeClr val="accent1"/>
+          </a:lnRef>
+          <a:fillRef idx="0">
+            <a:srgbClr val="FFFFFF"/>
+          </a:fillRef>
+          <a:effectRef idx="0">
+            <a:srgbClr val="FFFFFF"/>
+          </a:effectRef>
+          <a:fontRef idx="minor">
+            <a:schemeClr val="tx1"/>
+          </a:fontRef>
+        </p:style>
+        <p:txBody>
+          <a:bodyPr rtlCol="0" anchor="ctr"/>
+          <a:p>
+            <a:pPr algn="ctr"/>
+            <a:endParaRPr lang="zh-CN" altLang="en-US"/>
+          </a:p>
+        </p:txBody>
+      </p:sp>
+      <p:sp>
+        <p:nvSpPr>
+          <p:cNvPr id="95" name="减号 94"/>
+          <p:cNvSpPr/>
+          <p:nvPr/>
+        </p:nvSpPr>
+        <p:spPr>
+          <a:xfrm>
+            <a:off x="9222105" y="3524250"/>
+            <a:ext cx="193675" cy="193040"/>
+          </a:xfrm>
+          <a:prstGeom prst="mathMinus">
+            <a:avLst/>
+          </a:prstGeom>
+        </p:spPr>
+        <p:style>
+          <a:lnRef idx="2">
+            <a:schemeClr val="accent1">
+              <a:lumMod val="75000"/>
+            </a:schemeClr>
+          </a:lnRef>
+          <a:fillRef idx="1">
+            <a:schemeClr val="accent1"/>
+          </a:fillRef>
+          <a:effectRef idx="0">
+            <a:srgbClr val="FFFFFF"/>
+          </a:effectRef>
+          <a:fontRef idx="minor">
+            <a:schemeClr val="lt1"/>
+          </a:fontRef>
+        </p:style>
+        <p:txBody>
+          <a:bodyPr rtlCol="0" anchor="ctr"/>
+          <a:p>
+            <a:pPr algn="ctr"/>
+            <a:endParaRPr lang="zh-CN" altLang="en-US"/>
+          </a:p>
+        </p:txBody>
+      </p:sp>
+      <p:sp>
+        <p:nvSpPr>
+          <p:cNvPr id="96" name="等于号 95"/>
+          <p:cNvSpPr/>
+          <p:nvPr/>
+        </p:nvSpPr>
+        <p:spPr>
+          <a:xfrm>
+            <a:off x="8950325" y="3489960"/>
+            <a:ext cx="198755" cy="203835"/>
+          </a:xfrm>
+          <a:prstGeom prst="mathEqual">
+            <a:avLst/>
+          </a:prstGeom>
+          <a:solidFill>
+            <a:schemeClr val="tx1"/>
+          </a:solidFill>
+        </p:spPr>
+        <p:style>
+          <a:lnRef idx="2">
+            <a:schemeClr val="accent1">
+              <a:lumMod val="75000"/>
+            </a:schemeClr>
+          </a:lnRef>
+          <a:fillRef idx="1">
+            <a:schemeClr val="accent1"/>
+          </a:fillRef>
+          <a:effectRef idx="0">
+            <a:srgbClr val="FFFFFF"/>
+          </a:effectRef>
+          <a:fontRef idx="minor">
+            <a:schemeClr val="lt1"/>
+          </a:fontRef>
+        </p:style>
+        <p:txBody>
+          <a:bodyPr rtlCol="0" anchor="ctr"/>
+          <a:p>
+            <a:pPr algn="ctr"/>
+            <a:endParaRPr lang="zh-CN" altLang="en-US">
+              <a:solidFill>
+                <a:schemeClr val="tx1"/>
+              </a:solidFill>
+            </a:endParaRPr>
+          </a:p>
+        </p:txBody>
+      </p:sp>
+      <p:sp>
+        <p:nvSpPr>
+          <p:cNvPr id="97" name="等于号 96"/>
+          <p:cNvSpPr/>
+          <p:nvPr/>
+        </p:nvSpPr>
+        <p:spPr>
+          <a:xfrm>
+            <a:off x="8937625" y="3898265"/>
+            <a:ext cx="198755" cy="203835"/>
+          </a:xfrm>
+          <a:prstGeom prst="mathEqual">
+            <a:avLst/>
+          </a:prstGeom>
+          <a:solidFill>
+            <a:schemeClr val="tx1"/>
+          </a:solidFill>
+        </p:spPr>
+        <p:style>
+          <a:lnRef idx="2">
+            <a:schemeClr val="accent1">
+              <a:lumMod val="75000"/>
+            </a:schemeClr>
+          </a:lnRef>
+          <a:fillRef idx="1">
+            <a:schemeClr val="accent1"/>
+          </a:fillRef>
+          <a:effectRef idx="0">
+            <a:srgbClr val="FFFFFF"/>
+          </a:effectRef>
+          <a:fontRef idx="minor">
+            <a:schemeClr val="lt1"/>
+          </a:fontRef>
+        </p:style>
+        <p:txBody>
+          <a:bodyPr rtlCol="0" anchor="ctr"/>
+          <a:p>
+            <a:pPr algn="ctr"/>
+            <a:endParaRPr lang="zh-CN" altLang="en-US">
+              <a:solidFill>
+                <a:schemeClr val="tx1"/>
+              </a:solidFill>
+            </a:endParaRPr>
+          </a:p>
+        </p:txBody>
+      </p:sp>
+      <p:sp>
+        <p:nvSpPr>
+          <p:cNvPr id="98" name="等于号 97"/>
+          <p:cNvSpPr/>
+          <p:nvPr/>
+        </p:nvSpPr>
+        <p:spPr>
+          <a:xfrm>
+            <a:off x="8937625" y="4285615"/>
+            <a:ext cx="198755" cy="203835"/>
+          </a:xfrm>
+          <a:prstGeom prst="mathEqual">
+            <a:avLst/>
+          </a:prstGeom>
+          <a:solidFill>
+            <a:schemeClr val="tx1"/>
+          </a:solidFill>
+        </p:spPr>
+        <p:style>
+          <a:lnRef idx="2">
+            <a:schemeClr val="accent1">
+              <a:lumMod val="75000"/>
+            </a:schemeClr>
+          </a:lnRef>
+          <a:fillRef idx="1">
+            <a:schemeClr val="accent1"/>
+          </a:fillRef>
+          <a:effectRef idx="0">
+            <a:srgbClr val="FFFFFF"/>
+          </a:effectRef>
+          <a:fontRef idx="minor">
+            <a:schemeClr val="lt1"/>
+          </a:fontRef>
+        </p:style>
+        <p:txBody>
+          <a:bodyPr rtlCol="0" anchor="ctr"/>
+          <a:p>
+            <a:pPr algn="ctr"/>
+            <a:endParaRPr lang="zh-CN" altLang="en-US">
+              <a:solidFill>
+                <a:schemeClr val="tx1"/>
+              </a:solidFill>
+            </a:endParaRPr>
+          </a:p>
+        </p:txBody>
+      </p:sp>
+      <p:sp>
+        <p:nvSpPr>
+          <p:cNvPr id="99" name="圆角矩形 98"/>
+          <p:cNvSpPr/>
+          <p:nvPr/>
+        </p:nvSpPr>
+        <p:spPr>
+          <a:xfrm>
+            <a:off x="9893300" y="2571750"/>
+            <a:ext cx="1926590" cy="2743835"/>
+          </a:xfrm>
+          <a:prstGeom prst="roundRect">
+            <a:avLst/>
+          </a:prstGeom>
+        </p:spPr>
+        <p:style>
+          <a:lnRef idx="2">
+            <a:schemeClr val="accent1"/>
+          </a:lnRef>
+          <a:fillRef idx="0">
+            <a:srgbClr val="FFFFFF"/>
+          </a:fillRef>
+          <a:effectRef idx="0">
+            <a:srgbClr val="FFFFFF"/>
+          </a:effectRef>
+          <a:fontRef idx="minor">
+            <a:schemeClr val="tx1"/>
+          </a:fontRef>
+        </p:style>
+        <p:txBody>
+          <a:bodyPr rtlCol="0" anchor="ctr"/>
+          <a:p>
+            <a:pPr algn="ctr"/>
+            <a:endParaRPr lang="zh-CN" altLang="en-US"/>
+          </a:p>
+        </p:txBody>
+      </p:sp>
+      <p:pic>
+        <p:nvPicPr>
+          <p:cNvPr id="100" name="图片 99"/>
+          <p:cNvPicPr>
+            <a:picLocks noChangeAspect="1"/>
+          </p:cNvPicPr>
+          <p:nvPr/>
+        </p:nvPicPr>
+        <p:blipFill>
+          <a:blip r:embed="rId1"/>
+          <a:stretch>
+            <a:fillRect/>
+          </a:stretch>
+        </p:blipFill>
+        <p:spPr>
+          <a:xfrm>
+            <a:off x="10166350" y="2870200"/>
+            <a:ext cx="152400" cy="171450"/>
+          </a:xfrm>
+          <a:prstGeom prst="rect">
+            <a:avLst/>
+          </a:prstGeom>
+        </p:spPr>
+      </p:pic>
+      <p:cxnSp>
+        <p:nvCxnSpPr>
+          <p:cNvPr id="101" name="直接箭头连接符 100"/>
+          <p:cNvCxnSpPr/>
+          <p:nvPr/>
+        </p:nvCxnSpPr>
+        <p:spPr>
+          <a:xfrm flipV="1">
+            <a:off x="10365740" y="2944495"/>
+            <a:ext cx="674370" cy="9525"/>
+          </a:xfrm>
+          <a:prstGeom prst="straightConnector1">
+            <a:avLst/>
+          </a:prstGeom>
+          <a:ln>
+            <a:tailEnd type="arrow"/>
+          </a:ln>
+        </p:spPr>
+        <p:style>
+          <a:lnRef idx="2">
+            <a:schemeClr val="accent1"/>
+          </a:lnRef>
+          <a:fillRef idx="0">
+            <a:srgbClr val="FFFFFF"/>
+          </a:fillRef>
+          <a:effectRef idx="0">
+            <a:srgbClr val="FFFFFF"/>
+          </a:effectRef>
+          <a:fontRef idx="minor">
+            <a:schemeClr val="tx1"/>
+          </a:fontRef>
+        </p:style>
+      </p:cxnSp>
+      <p:sp>
+        <p:nvSpPr>
+          <p:cNvPr id="102" name="文本框 101"/>
+          <p:cNvSpPr txBox="1"/>
+          <p:nvPr/>
+        </p:nvSpPr>
+        <p:spPr>
+          <a:xfrm>
+            <a:off x="11087100" y="2726690"/>
+            <a:ext cx="918210" cy="368300"/>
+          </a:xfrm>
+          <a:prstGeom prst="rect">
+            <a:avLst/>
+          </a:prstGeom>
+          <a:noFill/>
+        </p:spPr>
+        <p:txBody>
+          <a:bodyPr wrap="square" rtlCol="0">
+            <a:spAutoFit/>
+          </a:bodyPr>
+          <a:p>
+            <a:r>
+              <a:rPr lang="zh-CN" altLang="en-US"/>
+              <a:t>开启</a:t>
+            </a:r>
+            <a:endParaRPr lang="zh-CN" altLang="en-US"/>
+          </a:p>
+        </p:txBody>
+      </p:sp>
+      <p:sp>
+        <p:nvSpPr>
+          <p:cNvPr id="103" name="矩形 102"/>
+          <p:cNvSpPr/>
+          <p:nvPr/>
+        </p:nvSpPr>
+        <p:spPr>
+          <a:xfrm>
+            <a:off x="10082530" y="3268980"/>
+            <a:ext cx="1529080" cy="1597025"/>
+          </a:xfrm>
+          <a:prstGeom prst="rect">
+            <a:avLst/>
+          </a:prstGeom>
+        </p:spPr>
+        <p:style>
+          <a:lnRef idx="2">
+            <a:schemeClr val="accent1"/>
+          </a:lnRef>
+          <a:fillRef idx="0">
+            <a:srgbClr val="FFFFFF"/>
+          </a:fillRef>
+          <a:effectRef idx="0">
+            <a:srgbClr val="FFFFFF"/>
+          </a:effectRef>
+          <a:fontRef idx="minor">
+            <a:schemeClr val="tx1"/>
+          </a:fontRef>
+        </p:style>
+        <p:txBody>
+          <a:bodyPr rtlCol="0" anchor="ctr"/>
+          <a:p>
+            <a:pPr algn="ctr"/>
+            <a:endParaRPr lang="zh-CN" altLang="en-US"/>
+          </a:p>
+        </p:txBody>
+      </p:sp>
+      <p:sp>
+        <p:nvSpPr>
+          <p:cNvPr id="104" name="文本框 103"/>
+          <p:cNvSpPr txBox="1"/>
+          <p:nvPr/>
+        </p:nvSpPr>
+        <p:spPr>
+          <a:xfrm>
+            <a:off x="10218420" y="3094990"/>
+            <a:ext cx="821690" cy="368300"/>
+          </a:xfrm>
+          <a:prstGeom prst="rect">
+            <a:avLst/>
+          </a:prstGeom>
+          <a:noFill/>
+        </p:spPr>
+        <p:txBody>
+          <a:bodyPr wrap="square" rtlCol="0">
+            <a:spAutoFit/>
+          </a:bodyPr>
+          <a:p>
+            <a:r>
+              <a:rPr lang="zh-CN" altLang="en-US"/>
+              <a:t>曲目</a:t>
+            </a:r>
+            <a:endParaRPr lang="zh-CN" altLang="en-US"/>
+          </a:p>
+        </p:txBody>
+      </p:sp>
+      <p:graphicFrame>
+        <p:nvGraphicFramePr>
+          <p:cNvPr id="105" name="表格 104"/>
+          <p:cNvGraphicFramePr/>
+          <p:nvPr>
+            <p:custDataLst>
+              <p:tags r:id="rId6"/>
+            </p:custDataLst>
+          </p:nvPr>
+        </p:nvGraphicFramePr>
+        <p:xfrm>
+          <a:off x="10077450" y="3463290"/>
+          <a:ext cx="1534795" cy="1143000"/>
+        </p:xfrm>
+        <a:graphic>
+          <a:graphicData uri="http://schemas.openxmlformats.org/drawingml/2006/table">
+            <a:tbl>
+              <a:tblPr firstRow="1" bandRow="1">
+                <a:tableStyleId>{5C22544A-7EE6-4342-B048-85BDC9FD1C3A}</a:tableStyleId>
+              </a:tblPr>
+              <a:tblGrid>
+                <a:gridCol w="1534795"/>
+              </a:tblGrid>
+              <a:tr h="381000">
+                <a:tc>
+                  <a:txBody>
+                    <a:bodyPr/>
+                    <a:p>
+                      <a:pPr>
+                        <a:buNone/>
+                      </a:pPr>
+                      <a:r>
+                        <a:rPr lang="en-US" altLang="zh-CN"/>
+                        <a:t>AA</a:t>
+                      </a:r>
+                      <a:endParaRPr lang="en-US" altLang="zh-CN"/>
+                    </a:p>
+                  </a:txBody>
+                  <a:tcPr/>
+                </a:tc>
+              </a:tr>
+              <a:tr h="381000">
+                <a:tc>
+                  <a:txBody>
+                    <a:bodyPr/>
+                    <a:p>
+                      <a:pPr>
+                        <a:buNone/>
+                      </a:pPr>
+                      <a:r>
+                        <a:rPr lang="en-US" altLang="zh-CN"/>
+                        <a:t>BB</a:t>
+                      </a:r>
+                      <a:endParaRPr lang="en-US" altLang="zh-CN"/>
+                    </a:p>
+                  </a:txBody>
+                  <a:tcPr/>
+                </a:tc>
+              </a:tr>
+              <a:tr h="381000">
+                <a:tc>
+                  <a:txBody>
+                    <a:bodyPr/>
+                    <a:p>
+                      <a:pPr>
+                        <a:buNone/>
+                      </a:pPr>
+                      <a:r>
+                        <a:rPr lang="en-US" altLang="zh-CN"/>
+                        <a:t>CC</a:t>
+                      </a:r>
+                      <a:endParaRPr lang="en-US" altLang="zh-CN"/>
+                    </a:p>
+                  </a:txBody>
+                  <a:tcPr/>
+                </a:tc>
+              </a:tr>
+            </a:tbl>
+          </a:graphicData>
+        </a:graphic>
+      </p:graphicFrame>
+      <p:sp>
+        <p:nvSpPr>
+          <p:cNvPr id="106" name="圆角矩形 105"/>
+          <p:cNvSpPr/>
+          <p:nvPr/>
+        </p:nvSpPr>
+        <p:spPr>
+          <a:xfrm>
+            <a:off x="10082530" y="5115560"/>
+            <a:ext cx="1513840" cy="805815"/>
+          </a:xfrm>
+          <a:prstGeom prst="roundRect">
+            <a:avLst/>
+          </a:prstGeom>
+        </p:spPr>
+        <p:style>
+          <a:lnRef idx="2">
+            <a:schemeClr val="accent1">
+              <a:lumMod val="75000"/>
+            </a:schemeClr>
+          </a:lnRef>
+          <a:fillRef idx="1">
+            <a:schemeClr val="accent1"/>
+          </a:fillRef>
+          <a:effectRef idx="0">
+            <a:srgbClr val="FFFFFF"/>
+          </a:effectRef>
+          <a:fontRef idx="minor">
+            <a:schemeClr val="lt1"/>
+          </a:fontRef>
+        </p:style>
+        <p:txBody>
+          <a:bodyPr rtlCol="0" anchor="ctr"/>
+          <a:p>
+            <a:pPr algn="ctr"/>
+            <a:r>
+              <a:rPr lang="zh-CN" altLang="en-US"/>
+              <a:t>随机播放</a:t>
+            </a:r>
+            <a:endParaRPr lang="zh-CN" altLang="en-US"/>
+          </a:p>
+          <a:p>
+            <a:pPr algn="ctr"/>
+            <a:r>
+              <a:rPr lang="zh-CN" altLang="en-US"/>
+              <a:t>顺序播放</a:t>
+            </a:r>
+            <a:endParaRPr lang="zh-CN" altLang="en-US"/>
+          </a:p>
+          <a:p>
+            <a:pPr algn="ctr"/>
+            <a:r>
+              <a:rPr lang="zh-CN" altLang="en-US"/>
+              <a:t>单曲循环</a:t>
+            </a:r>
+            <a:endParaRPr lang="zh-CN" altLang="en-US"/>
+          </a:p>
+        </p:txBody>
+      </p:sp>
+      <p:sp>
+        <p:nvSpPr>
+          <p:cNvPr id="107" name="文本框 106"/>
+          <p:cNvSpPr txBox="1"/>
+          <p:nvPr/>
+        </p:nvSpPr>
+        <p:spPr>
+          <a:xfrm>
+            <a:off x="10077450" y="4497705"/>
+            <a:ext cx="1463040" cy="368300"/>
+          </a:xfrm>
+          <a:prstGeom prst="rect">
+            <a:avLst/>
+          </a:prstGeom>
+          <a:noFill/>
+        </p:spPr>
+        <p:txBody>
+          <a:bodyPr wrap="square" rtlCol="0">
+            <a:spAutoFit/>
+          </a:bodyPr>
+          <a:p>
+            <a:r>
+              <a:rPr lang="en-US" altLang="zh-CN"/>
+              <a:t>+</a:t>
+            </a:r>
+            <a:endParaRPr lang="en-US" altLang="zh-CN"/>
+          </a:p>
+        </p:txBody>
+      </p:sp>
+      <p:sp>
+        <p:nvSpPr>
+          <p:cNvPr id="108" name="椭圆 107"/>
+          <p:cNvSpPr/>
+          <p:nvPr/>
+        </p:nvSpPr>
+        <p:spPr>
+          <a:xfrm>
+            <a:off x="10130790" y="4619625"/>
+            <a:ext cx="226695" cy="198120"/>
+          </a:xfrm>
+          <a:prstGeom prst="ellipse">
+            <a:avLst/>
+          </a:prstGeom>
+        </p:spPr>
+        <p:style>
+          <a:lnRef idx="2">
+            <a:schemeClr val="accent1"/>
+          </a:lnRef>
+          <a:fillRef idx="0">
+            <a:srgbClr val="FFFFFF"/>
+          </a:fillRef>
+          <a:effectRef idx="0">
+            <a:srgbClr val="FFFFFF"/>
+          </a:effectRef>
+          <a:fontRef idx="minor">
+            <a:schemeClr val="tx1"/>
+          </a:fontRef>
+        </p:style>
+        <p:txBody>
+          <a:bodyPr rtlCol="0" anchor="ctr"/>
+          <a:p>
+            <a:pPr algn="ctr"/>
+            <a:endParaRPr lang="zh-CN" altLang="en-US"/>
+          </a:p>
+        </p:txBody>
+      </p:sp>
+      <p:sp>
+        <p:nvSpPr>
+          <p:cNvPr id="109" name="椭圆 108"/>
+          <p:cNvSpPr/>
+          <p:nvPr/>
+        </p:nvSpPr>
+        <p:spPr>
+          <a:xfrm>
+            <a:off x="10092055" y="5180965"/>
+            <a:ext cx="226695" cy="198120"/>
+          </a:xfrm>
+          <a:prstGeom prst="ellipse">
+            <a:avLst/>
+          </a:prstGeom>
+          <a:ln>
+            <a:solidFill>
+              <a:schemeClr val="tx1"/>
+            </a:solidFill>
+          </a:ln>
+        </p:spPr>
+        <p:style>
+          <a:lnRef idx="2">
+            <a:schemeClr val="accent1"/>
+          </a:lnRef>
+          <a:fillRef idx="0">
+            <a:srgbClr val="FFFFFF"/>
+          </a:fillRef>
+          <a:effectRef idx="0">
+            <a:srgbClr val="FFFFFF"/>
+          </a:effectRef>
+          <a:fontRef idx="minor">
+            <a:schemeClr val="tx1"/>
+          </a:fontRef>
+        </p:style>
+        <p:txBody>
+          <a:bodyPr rtlCol="0" anchor="ctr"/>
+          <a:p>
+            <a:pPr algn="ctr"/>
+            <a:endParaRPr lang="zh-CN" altLang="en-US"/>
+          </a:p>
+        </p:txBody>
+      </p:sp>
+      <p:sp>
+        <p:nvSpPr>
+          <p:cNvPr id="110" name="椭圆 109"/>
+          <p:cNvSpPr/>
+          <p:nvPr/>
+        </p:nvSpPr>
+        <p:spPr>
+          <a:xfrm>
+            <a:off x="10082530" y="5635625"/>
+            <a:ext cx="226695" cy="198120"/>
+          </a:xfrm>
+          <a:prstGeom prst="ellipse">
+            <a:avLst/>
+          </a:prstGeom>
+          <a:ln>
+            <a:solidFill>
+              <a:schemeClr val="tx1"/>
+            </a:solidFill>
+          </a:ln>
+        </p:spPr>
+        <p:style>
+          <a:lnRef idx="2">
+            <a:schemeClr val="accent1"/>
+          </a:lnRef>
+          <a:fillRef idx="0">
+            <a:srgbClr val="FFFFFF"/>
+          </a:fillRef>
+          <a:effectRef idx="0">
+            <a:srgbClr val="FFFFFF"/>
+          </a:effectRef>
+          <a:fontRef idx="minor">
+            <a:schemeClr val="tx1"/>
+          </a:fontRef>
+        </p:style>
+        <p:txBody>
+          <a:bodyPr rtlCol="0" anchor="ctr"/>
+          <a:p>
+            <a:pPr algn="ctr"/>
+            <a:endParaRPr lang="zh-CN" altLang="en-US"/>
+          </a:p>
+        </p:txBody>
+      </p:sp>
+      <p:sp>
+        <p:nvSpPr>
+          <p:cNvPr id="111" name="椭圆 110"/>
+          <p:cNvSpPr/>
+          <p:nvPr/>
+        </p:nvSpPr>
+        <p:spPr>
+          <a:xfrm>
+            <a:off x="10082530" y="5408295"/>
+            <a:ext cx="226695" cy="198120"/>
+          </a:xfrm>
+          <a:prstGeom prst="ellipse">
+            <a:avLst/>
+          </a:prstGeom>
+          <a:ln>
+            <a:solidFill>
+              <a:schemeClr val="tx1"/>
+            </a:solidFill>
+          </a:ln>
+        </p:spPr>
+        <p:style>
+          <a:lnRef idx="2">
+            <a:schemeClr val="accent1"/>
+          </a:lnRef>
+          <a:fillRef idx="0">
+            <a:srgbClr val="FFFFFF"/>
+          </a:fillRef>
+          <a:effectRef idx="0">
+            <a:srgbClr val="FFFFFF"/>
+          </a:effectRef>
+          <a:fontRef idx="minor">
+            <a:schemeClr val="tx1"/>
+          </a:fontRef>
+        </p:style>
+        <p:txBody>
+          <a:bodyPr rtlCol="0" anchor="ctr"/>
+          <a:p>
+            <a:pPr algn="ctr"/>
+            <a:endParaRPr lang="zh-CN" altLang="en-US"/>
+          </a:p>
+        </p:txBody>
+      </p:sp>
+      <p:sp>
+        <p:nvSpPr>
+          <p:cNvPr id="112" name="减号 111"/>
+          <p:cNvSpPr/>
+          <p:nvPr/>
+        </p:nvSpPr>
+        <p:spPr>
+          <a:xfrm>
+            <a:off x="11626215" y="3558540"/>
+            <a:ext cx="193675" cy="193040"/>
+          </a:xfrm>
+          <a:prstGeom prst="mathMinus">
+            <a:avLst/>
+          </a:prstGeom>
+        </p:spPr>
+        <p:style>
+          <a:lnRef idx="2">
+            <a:schemeClr val="accent1">
+              <a:lumMod val="75000"/>
+            </a:schemeClr>
+          </a:lnRef>
+          <a:fillRef idx="1">
+            <a:schemeClr val="accent1"/>
+          </a:fillRef>
+          <a:effectRef idx="0">
+            <a:srgbClr val="FFFFFF"/>
+          </a:effectRef>
+          <a:fontRef idx="minor">
+            <a:schemeClr val="lt1"/>
+          </a:fontRef>
+        </p:style>
+        <p:txBody>
+          <a:bodyPr rtlCol="0" anchor="ctr"/>
+          <a:p>
+            <a:pPr algn="ctr"/>
+            <a:endParaRPr lang="zh-CN" altLang="en-US"/>
+          </a:p>
+        </p:txBody>
+      </p:sp>
+      <p:sp>
+        <p:nvSpPr>
+          <p:cNvPr id="113" name="等于号 112"/>
+          <p:cNvSpPr/>
+          <p:nvPr/>
+        </p:nvSpPr>
+        <p:spPr>
+          <a:xfrm>
+            <a:off x="11354435" y="3524250"/>
+            <a:ext cx="198755" cy="203835"/>
+          </a:xfrm>
+          <a:prstGeom prst="mathEqual">
+            <a:avLst/>
+          </a:prstGeom>
+          <a:solidFill>
+            <a:schemeClr val="tx1"/>
+          </a:solidFill>
+        </p:spPr>
+        <p:style>
+          <a:lnRef idx="2">
+            <a:schemeClr val="accent1">
+              <a:lumMod val="75000"/>
+            </a:schemeClr>
+          </a:lnRef>
+          <a:fillRef idx="1">
+            <a:schemeClr val="accent1"/>
+          </a:fillRef>
+          <a:effectRef idx="0">
+            <a:srgbClr val="FFFFFF"/>
+          </a:effectRef>
+          <a:fontRef idx="minor">
+            <a:schemeClr val="lt1"/>
+          </a:fontRef>
+        </p:style>
+        <p:txBody>
+          <a:bodyPr rtlCol="0" anchor="ctr"/>
+          <a:p>
+            <a:pPr algn="ctr"/>
+            <a:endParaRPr lang="zh-CN" altLang="en-US">
+              <a:solidFill>
+                <a:schemeClr val="tx1"/>
+              </a:solidFill>
+            </a:endParaRPr>
+          </a:p>
+        </p:txBody>
+      </p:sp>
+      <p:sp>
+        <p:nvSpPr>
+          <p:cNvPr id="114" name="等于号 113"/>
+          <p:cNvSpPr/>
+          <p:nvPr/>
+        </p:nvSpPr>
+        <p:spPr>
+          <a:xfrm>
+            <a:off x="11341735" y="3932555"/>
+            <a:ext cx="198755" cy="203835"/>
+          </a:xfrm>
+          <a:prstGeom prst="mathEqual">
+            <a:avLst/>
+          </a:prstGeom>
+          <a:solidFill>
+            <a:schemeClr val="tx1"/>
+          </a:solidFill>
+        </p:spPr>
+        <p:style>
+          <a:lnRef idx="2">
+            <a:schemeClr val="accent1">
+              <a:lumMod val="75000"/>
+            </a:schemeClr>
+          </a:lnRef>
+          <a:fillRef idx="1">
+            <a:schemeClr val="accent1"/>
+          </a:fillRef>
+          <a:effectRef idx="0">
+            <a:srgbClr val="FFFFFF"/>
+          </a:effectRef>
+          <a:fontRef idx="minor">
+            <a:schemeClr val="lt1"/>
+          </a:fontRef>
+        </p:style>
+        <p:txBody>
+          <a:bodyPr rtlCol="0" anchor="ctr"/>
+          <a:p>
+            <a:pPr algn="ctr"/>
+            <a:endParaRPr lang="zh-CN" altLang="en-US">
+              <a:solidFill>
+                <a:schemeClr val="tx1"/>
+              </a:solidFill>
+            </a:endParaRPr>
+          </a:p>
+        </p:txBody>
+      </p:sp>
+      <p:sp>
+        <p:nvSpPr>
+          <p:cNvPr id="115" name="等于号 114"/>
+          <p:cNvSpPr/>
+          <p:nvPr/>
+        </p:nvSpPr>
+        <p:spPr>
+          <a:xfrm>
+            <a:off x="11341735" y="4319905"/>
+            <a:ext cx="198755" cy="203835"/>
+          </a:xfrm>
+          <a:prstGeom prst="mathEqual">
+            <a:avLst/>
+          </a:prstGeom>
+          <a:solidFill>
+            <a:schemeClr val="tx1"/>
+          </a:solidFill>
+        </p:spPr>
+        <p:style>
+          <a:lnRef idx="2">
+            <a:schemeClr val="accent1">
+              <a:lumMod val="75000"/>
+            </a:schemeClr>
+          </a:lnRef>
+          <a:fillRef idx="1">
+            <a:schemeClr val="accent1"/>
+          </a:fillRef>
+          <a:effectRef idx="0">
+            <a:srgbClr val="FFFFFF"/>
+          </a:effectRef>
+          <a:fontRef idx="minor">
+            <a:schemeClr val="lt1"/>
+          </a:fontRef>
+        </p:style>
+        <p:txBody>
+          <a:bodyPr rtlCol="0" anchor="ctr"/>
+          <a:p>
+            <a:pPr algn="ctr"/>
+            <a:endParaRPr lang="zh-CN" altLang="en-US">
+              <a:solidFill>
+                <a:schemeClr val="tx1"/>
+              </a:solidFill>
+            </a:endParaRPr>
+          </a:p>
+        </p:txBody>
+      </p:sp>
+      <p:sp>
+        <p:nvSpPr>
+          <p:cNvPr id="116" name="减号 115"/>
+          <p:cNvSpPr/>
+          <p:nvPr/>
+        </p:nvSpPr>
+        <p:spPr>
+          <a:xfrm>
+            <a:off x="2356485" y="3966210"/>
+            <a:ext cx="193675" cy="193040"/>
+          </a:xfrm>
+          <a:prstGeom prst="mathMinus">
+            <a:avLst/>
+          </a:prstGeom>
+        </p:spPr>
+        <p:style>
+          <a:lnRef idx="2">
+            <a:schemeClr val="accent1">
+              <a:lumMod val="75000"/>
+            </a:schemeClr>
+          </a:lnRef>
+          <a:fillRef idx="1">
+            <a:schemeClr val="accent1"/>
+          </a:fillRef>
+          <a:effectRef idx="0">
+            <a:srgbClr val="FFFFFF"/>
+          </a:effectRef>
+          <a:fontRef idx="minor">
+            <a:schemeClr val="lt1"/>
+          </a:fontRef>
+        </p:style>
+        <p:txBody>
+          <a:bodyPr rtlCol="0" anchor="ctr"/>
+          <a:p>
+            <a:pPr algn="ctr"/>
+            <a:endParaRPr lang="zh-CN" altLang="en-US"/>
+          </a:p>
+        </p:txBody>
+      </p:sp>
+      <p:sp>
+        <p:nvSpPr>
+          <p:cNvPr id="117" name="减号 116"/>
+          <p:cNvSpPr/>
+          <p:nvPr/>
+        </p:nvSpPr>
+        <p:spPr>
+          <a:xfrm>
+            <a:off x="2342515" y="4364355"/>
+            <a:ext cx="193675" cy="193040"/>
+          </a:xfrm>
+          <a:prstGeom prst="mathMinus">
+            <a:avLst/>
+          </a:prstGeom>
+        </p:spPr>
+        <p:style>
+          <a:lnRef idx="2">
+            <a:schemeClr val="accent1">
+              <a:lumMod val="75000"/>
+            </a:schemeClr>
+          </a:lnRef>
+          <a:fillRef idx="1">
+            <a:schemeClr val="accent1"/>
+          </a:fillRef>
+          <a:effectRef idx="0">
+            <a:srgbClr val="FFFFFF"/>
+          </a:effectRef>
+          <a:fontRef idx="minor">
+            <a:schemeClr val="lt1"/>
+          </a:fontRef>
+        </p:style>
+        <p:txBody>
+          <a:bodyPr rtlCol="0" anchor="ctr"/>
+          <a:p>
+            <a:pPr algn="ctr"/>
+            <a:endParaRPr lang="zh-CN" altLang="en-US"/>
+          </a:p>
+        </p:txBody>
+      </p:sp>
+      <p:sp>
+        <p:nvSpPr>
+          <p:cNvPr id="118" name="减号 117"/>
+          <p:cNvSpPr/>
+          <p:nvPr/>
+        </p:nvSpPr>
+        <p:spPr>
+          <a:xfrm>
+            <a:off x="4599940" y="3966210"/>
+            <a:ext cx="193675" cy="193040"/>
+          </a:xfrm>
+          <a:prstGeom prst="mathMinus">
+            <a:avLst/>
+          </a:prstGeom>
+        </p:spPr>
+        <p:style>
+          <a:lnRef idx="2">
+            <a:schemeClr val="accent1">
+              <a:lumMod val="75000"/>
+            </a:schemeClr>
+          </a:lnRef>
+          <a:fillRef idx="1">
+            <a:schemeClr val="accent1"/>
+          </a:fillRef>
+          <a:effectRef idx="0">
+            <a:srgbClr val="FFFFFF"/>
+          </a:effectRef>
+          <a:fontRef idx="minor">
+            <a:schemeClr val="lt1"/>
+          </a:fontRef>
+        </p:style>
+        <p:txBody>
+          <a:bodyPr rtlCol="0" anchor="ctr"/>
+          <a:p>
+            <a:pPr algn="ctr"/>
+            <a:endParaRPr lang="zh-CN" altLang="en-US"/>
+          </a:p>
+        </p:txBody>
+      </p:sp>
+      <p:sp>
+        <p:nvSpPr>
+          <p:cNvPr id="119" name="减号 118"/>
+          <p:cNvSpPr/>
+          <p:nvPr/>
+        </p:nvSpPr>
+        <p:spPr>
+          <a:xfrm>
+            <a:off x="4585970" y="4364355"/>
+            <a:ext cx="193675" cy="193040"/>
+          </a:xfrm>
+          <a:prstGeom prst="mathMinus">
+            <a:avLst/>
+          </a:prstGeom>
+        </p:spPr>
+        <p:style>
+          <a:lnRef idx="2">
+            <a:schemeClr val="accent1">
+              <a:lumMod val="75000"/>
+            </a:schemeClr>
+          </a:lnRef>
+          <a:fillRef idx="1">
+            <a:schemeClr val="accent1"/>
+          </a:fillRef>
+          <a:effectRef idx="0">
+            <a:srgbClr val="FFFFFF"/>
+          </a:effectRef>
+          <a:fontRef idx="minor">
+            <a:schemeClr val="lt1"/>
+          </a:fontRef>
+        </p:style>
+        <p:txBody>
+          <a:bodyPr rtlCol="0" anchor="ctr"/>
+          <a:p>
+            <a:pPr algn="ctr"/>
+            <a:endParaRPr lang="zh-CN" altLang="en-US"/>
+          </a:p>
+        </p:txBody>
+      </p:sp>
+      <p:sp>
+        <p:nvSpPr>
+          <p:cNvPr id="120" name="减号 119"/>
+          <p:cNvSpPr/>
+          <p:nvPr/>
+        </p:nvSpPr>
+        <p:spPr>
+          <a:xfrm>
+            <a:off x="6925310" y="3977005"/>
+            <a:ext cx="193675" cy="193040"/>
+          </a:xfrm>
+          <a:prstGeom prst="mathMinus">
+            <a:avLst/>
+          </a:prstGeom>
+        </p:spPr>
+        <p:style>
+          <a:lnRef idx="2">
+            <a:schemeClr val="accent1">
+              <a:lumMod val="75000"/>
+            </a:schemeClr>
+          </a:lnRef>
+          <a:fillRef idx="1">
+            <a:schemeClr val="accent1"/>
+          </a:fillRef>
+          <a:effectRef idx="0">
+            <a:srgbClr val="FFFFFF"/>
+          </a:effectRef>
+          <a:fontRef idx="minor">
+            <a:schemeClr val="lt1"/>
+          </a:fontRef>
+        </p:style>
+        <p:txBody>
+          <a:bodyPr rtlCol="0" anchor="ctr"/>
+          <a:p>
+            <a:pPr algn="ctr"/>
+            <a:endParaRPr lang="zh-CN" altLang="en-US"/>
+          </a:p>
+        </p:txBody>
+      </p:sp>
+      <p:sp>
+        <p:nvSpPr>
+          <p:cNvPr id="121" name="减号 120"/>
+          <p:cNvSpPr/>
+          <p:nvPr/>
+        </p:nvSpPr>
+        <p:spPr>
+          <a:xfrm>
+            <a:off x="6911340" y="4375150"/>
+            <a:ext cx="193675" cy="193040"/>
+          </a:xfrm>
+          <a:prstGeom prst="mathMinus">
+            <a:avLst/>
+          </a:prstGeom>
+        </p:spPr>
+        <p:style>
+          <a:lnRef idx="2">
+            <a:schemeClr val="accent1">
+              <a:lumMod val="75000"/>
+            </a:schemeClr>
+          </a:lnRef>
+          <a:fillRef idx="1">
+            <a:schemeClr val="accent1"/>
+          </a:fillRef>
+          <a:effectRef idx="0">
+            <a:srgbClr val="FFFFFF"/>
+          </a:effectRef>
+          <a:fontRef idx="minor">
+            <a:schemeClr val="lt1"/>
+          </a:fontRef>
+        </p:style>
+        <p:txBody>
+          <a:bodyPr rtlCol="0" anchor="ctr"/>
+          <a:p>
+            <a:pPr algn="ctr"/>
+            <a:endParaRPr lang="zh-CN" altLang="en-US"/>
+          </a:p>
+        </p:txBody>
+      </p:sp>
+      <p:sp>
+        <p:nvSpPr>
+          <p:cNvPr id="122" name="减号 121"/>
+          <p:cNvSpPr/>
+          <p:nvPr/>
+        </p:nvSpPr>
+        <p:spPr>
+          <a:xfrm>
+            <a:off x="9222105" y="3932555"/>
+            <a:ext cx="193675" cy="193040"/>
+          </a:xfrm>
+          <a:prstGeom prst="mathMinus">
+            <a:avLst/>
+          </a:prstGeom>
+        </p:spPr>
+        <p:style>
+          <a:lnRef idx="2">
+            <a:schemeClr val="accent1">
+              <a:lumMod val="75000"/>
+            </a:schemeClr>
+          </a:lnRef>
+          <a:fillRef idx="1">
+            <a:schemeClr val="accent1"/>
+          </a:fillRef>
+          <a:effectRef idx="0">
+            <a:srgbClr val="FFFFFF"/>
+          </a:effectRef>
+          <a:fontRef idx="minor">
+            <a:schemeClr val="lt1"/>
+          </a:fontRef>
+        </p:style>
+        <p:txBody>
+          <a:bodyPr rtlCol="0" anchor="ctr"/>
+          <a:p>
+            <a:pPr algn="ctr"/>
+            <a:endParaRPr lang="zh-CN" altLang="en-US"/>
+          </a:p>
+        </p:txBody>
+      </p:sp>
+      <p:sp>
+        <p:nvSpPr>
+          <p:cNvPr id="123" name="减号 122"/>
+          <p:cNvSpPr/>
+          <p:nvPr/>
+        </p:nvSpPr>
+        <p:spPr>
+          <a:xfrm>
+            <a:off x="9208135" y="4330700"/>
+            <a:ext cx="193675" cy="193040"/>
+          </a:xfrm>
+          <a:prstGeom prst="mathMinus">
+            <a:avLst/>
+          </a:prstGeom>
+        </p:spPr>
+        <p:style>
+          <a:lnRef idx="2">
+            <a:schemeClr val="accent1">
+              <a:lumMod val="75000"/>
+            </a:schemeClr>
+          </a:lnRef>
+          <a:fillRef idx="1">
+            <a:schemeClr val="accent1"/>
+          </a:fillRef>
+          <a:effectRef idx="0">
+            <a:srgbClr val="FFFFFF"/>
+          </a:effectRef>
+          <a:fontRef idx="minor">
+            <a:schemeClr val="lt1"/>
+          </a:fontRef>
+        </p:style>
+        <p:txBody>
+          <a:bodyPr rtlCol="0" anchor="ctr"/>
+          <a:p>
+            <a:pPr algn="ctr"/>
+            <a:endParaRPr lang="zh-CN" altLang="en-US"/>
+          </a:p>
+        </p:txBody>
+      </p:sp>
+      <p:sp>
+        <p:nvSpPr>
+          <p:cNvPr id="124" name="减号 123"/>
+          <p:cNvSpPr/>
+          <p:nvPr/>
+        </p:nvSpPr>
+        <p:spPr>
+          <a:xfrm>
+            <a:off x="11612245" y="3943350"/>
+            <a:ext cx="193675" cy="193040"/>
+          </a:xfrm>
+          <a:prstGeom prst="mathMinus">
+            <a:avLst/>
+          </a:prstGeom>
+        </p:spPr>
+        <p:style>
+          <a:lnRef idx="2">
+            <a:schemeClr val="accent1">
+              <a:lumMod val="75000"/>
+            </a:schemeClr>
+          </a:lnRef>
+          <a:fillRef idx="1">
+            <a:schemeClr val="accent1"/>
+          </a:fillRef>
+          <a:effectRef idx="0">
+            <a:srgbClr val="FFFFFF"/>
+          </a:effectRef>
+          <a:fontRef idx="minor">
+            <a:schemeClr val="lt1"/>
+          </a:fontRef>
+        </p:style>
+        <p:txBody>
+          <a:bodyPr rtlCol="0" anchor="ctr"/>
+          <a:p>
+            <a:pPr algn="ctr"/>
+            <a:endParaRPr lang="zh-CN" altLang="en-US"/>
+          </a:p>
+        </p:txBody>
+      </p:sp>
+      <p:sp>
+        <p:nvSpPr>
+          <p:cNvPr id="125" name="减号 124"/>
+          <p:cNvSpPr/>
+          <p:nvPr/>
+        </p:nvSpPr>
+        <p:spPr>
+          <a:xfrm>
+            <a:off x="11598275" y="4341495"/>
+            <a:ext cx="193675" cy="193040"/>
+          </a:xfrm>
+          <a:prstGeom prst="mathMinus">
+            <a:avLst/>
+          </a:prstGeom>
+        </p:spPr>
+        <p:style>
+          <a:lnRef idx="2">
+            <a:schemeClr val="accent1">
+              <a:lumMod val="75000"/>
+            </a:schemeClr>
+          </a:lnRef>
+          <a:fillRef idx="1">
+            <a:schemeClr val="accent1"/>
+          </a:fillRef>
+          <a:effectRef idx="0">
+            <a:srgbClr val="FFFFFF"/>
+          </a:effectRef>
+          <a:fontRef idx="minor">
+            <a:schemeClr val="lt1"/>
+          </a:fontRef>
+        </p:style>
+        <p:txBody>
+          <a:bodyPr rtlCol="0" anchor="ctr"/>
+          <a:p>
+            <a:pPr algn="ctr"/>
+            <a:endParaRPr lang="zh-CN" altLang="en-US"/>
+          </a:p>
+        </p:txBody>
+      </p:sp>
+      <p:sp>
+        <p:nvSpPr>
+          <p:cNvPr id="126" name="动作按钮: 前进或下一项 125">
+            <a:hlinkClick r:id="" action="ppaction://hlinkshowjump?jump=nextslide"/>
+          </p:cNvPr>
+          <p:cNvSpPr/>
+          <p:nvPr/>
+        </p:nvSpPr>
+        <p:spPr>
+          <a:xfrm>
+            <a:off x="623570" y="3622040"/>
+            <a:ext cx="162560" cy="135890"/>
+          </a:xfrm>
+          <a:prstGeom prst="actionButtonForwardNext">
+            <a:avLst/>
+          </a:prstGeom>
+        </p:spPr>
+        <p:style>
+          <a:lnRef idx="2">
+            <a:schemeClr val="accent1">
+              <a:lumMod val="75000"/>
+            </a:schemeClr>
+          </a:lnRef>
+          <a:fillRef idx="1">
+            <a:schemeClr val="accent1"/>
+          </a:fillRef>
+          <a:effectRef idx="0">
+            <a:srgbClr val="FFFFFF"/>
+          </a:effectRef>
+          <a:fontRef idx="minor">
+            <a:schemeClr val="lt1"/>
+          </a:fontRef>
+        </p:style>
+        <p:txBody>
+          <a:bodyPr rtlCol="0" anchor="ctr"/>
+          <a:p>
+            <a:pPr algn="ctr"/>
+            <a:endParaRPr lang="zh-CN" altLang="en-US"/>
+          </a:p>
+        </p:txBody>
+      </p:sp>
+      <p:sp>
+        <p:nvSpPr>
+          <p:cNvPr id="127" name="动作按钮: 前进或下一项 126">
+            <a:hlinkClick r:id="" action="ppaction://hlinkshowjump?jump=nextslide"/>
+          </p:cNvPr>
+          <p:cNvSpPr/>
+          <p:nvPr/>
+        </p:nvSpPr>
+        <p:spPr>
+          <a:xfrm>
+            <a:off x="623570" y="4023360"/>
+            <a:ext cx="162560" cy="135890"/>
+          </a:xfrm>
+          <a:prstGeom prst="actionButtonForwardNext">
+            <a:avLst/>
+          </a:prstGeom>
+        </p:spPr>
+        <p:style>
+          <a:lnRef idx="2">
+            <a:schemeClr val="accent1">
+              <a:lumMod val="75000"/>
+            </a:schemeClr>
+          </a:lnRef>
+          <a:fillRef idx="1">
+            <a:schemeClr val="accent1"/>
+          </a:fillRef>
+          <a:effectRef idx="0">
+            <a:srgbClr val="FFFFFF"/>
+          </a:effectRef>
+          <a:fontRef idx="minor">
+            <a:schemeClr val="lt1"/>
+          </a:fontRef>
+        </p:style>
+        <p:txBody>
+          <a:bodyPr rtlCol="0" anchor="ctr"/>
+          <a:p>
+            <a:pPr algn="ctr"/>
+            <a:endParaRPr lang="zh-CN" altLang="en-US"/>
+          </a:p>
+        </p:txBody>
+      </p:sp>
+      <p:sp>
+        <p:nvSpPr>
+          <p:cNvPr id="128" name="动作按钮: 前进或下一项 127">
+            <a:hlinkClick r:id="" action="ppaction://hlinkshowjump?jump=nextslide"/>
+          </p:cNvPr>
+          <p:cNvSpPr/>
+          <p:nvPr/>
+        </p:nvSpPr>
+        <p:spPr>
+          <a:xfrm>
+            <a:off x="623570" y="4398645"/>
+            <a:ext cx="162560" cy="135890"/>
+          </a:xfrm>
+          <a:prstGeom prst="actionButtonForwardNext">
+            <a:avLst/>
+          </a:prstGeom>
+        </p:spPr>
+        <p:style>
+          <a:lnRef idx="2">
+            <a:schemeClr val="accent1">
+              <a:lumMod val="75000"/>
+            </a:schemeClr>
+          </a:lnRef>
+          <a:fillRef idx="1">
+            <a:schemeClr val="accent1"/>
+          </a:fillRef>
+          <a:effectRef idx="0">
+            <a:srgbClr val="FFFFFF"/>
+          </a:effectRef>
+          <a:fontRef idx="minor">
+            <a:schemeClr val="lt1"/>
+          </a:fontRef>
+        </p:style>
+        <p:txBody>
+          <a:bodyPr rtlCol="0" anchor="ctr"/>
+          <a:p>
+            <a:pPr algn="ctr"/>
+            <a:endParaRPr lang="zh-CN" altLang="en-US"/>
+          </a:p>
+        </p:txBody>
+      </p:sp>
+      <p:sp>
+        <p:nvSpPr>
+          <p:cNvPr id="129" name="动作按钮: 前进或下一项 128">
+            <a:hlinkClick r:id="" action="ppaction://hlinkshowjump?jump=nextslide"/>
+          </p:cNvPr>
+          <p:cNvSpPr/>
+          <p:nvPr/>
+        </p:nvSpPr>
+        <p:spPr>
+          <a:xfrm>
+            <a:off x="2867025" y="3592195"/>
+            <a:ext cx="162560" cy="135890"/>
+          </a:xfrm>
+          <a:prstGeom prst="actionButtonForwardNext">
+            <a:avLst/>
+          </a:prstGeom>
+        </p:spPr>
+        <p:style>
+          <a:lnRef idx="2">
+            <a:schemeClr val="accent1">
+              <a:lumMod val="75000"/>
+            </a:schemeClr>
+          </a:lnRef>
+          <a:fillRef idx="1">
+            <a:schemeClr val="accent1"/>
+          </a:fillRef>
+          <a:effectRef idx="0">
+            <a:srgbClr val="FFFFFF"/>
+          </a:effectRef>
+          <a:fontRef idx="minor">
+            <a:schemeClr val="lt1"/>
+          </a:fontRef>
+        </p:style>
+        <p:txBody>
+          <a:bodyPr rtlCol="0" anchor="ctr"/>
+          <a:p>
+            <a:pPr algn="ctr"/>
+            <a:endParaRPr lang="zh-CN" altLang="en-US"/>
+          </a:p>
+        </p:txBody>
+      </p:sp>
+      <p:sp>
+        <p:nvSpPr>
+          <p:cNvPr id="130" name="动作按钮: 前进或下一项 129">
+            <a:hlinkClick r:id="" action="ppaction://hlinkshowjump?jump=nextslide"/>
+          </p:cNvPr>
+          <p:cNvSpPr/>
+          <p:nvPr/>
+        </p:nvSpPr>
+        <p:spPr>
+          <a:xfrm>
+            <a:off x="2867025" y="3993515"/>
+            <a:ext cx="162560" cy="135890"/>
+          </a:xfrm>
+          <a:prstGeom prst="actionButtonForwardNext">
+            <a:avLst/>
+          </a:prstGeom>
+        </p:spPr>
+        <p:style>
+          <a:lnRef idx="2">
+            <a:schemeClr val="accent1">
+              <a:lumMod val="75000"/>
+            </a:schemeClr>
+          </a:lnRef>
+          <a:fillRef idx="1">
+            <a:schemeClr val="accent1"/>
+          </a:fillRef>
+          <a:effectRef idx="0">
+            <a:srgbClr val="FFFFFF"/>
+          </a:effectRef>
+          <a:fontRef idx="minor">
+            <a:schemeClr val="lt1"/>
+          </a:fontRef>
+        </p:style>
+        <p:txBody>
+          <a:bodyPr rtlCol="0" anchor="ctr"/>
+          <a:p>
+            <a:pPr algn="ctr"/>
+            <a:endParaRPr lang="zh-CN" altLang="en-US"/>
+          </a:p>
+        </p:txBody>
+      </p:sp>
+      <p:sp>
+        <p:nvSpPr>
+          <p:cNvPr id="131" name="动作按钮: 前进或下一项 130">
+            <a:hlinkClick r:id="" action="ppaction://hlinkshowjump?jump=nextslide"/>
+          </p:cNvPr>
+          <p:cNvSpPr/>
+          <p:nvPr/>
+        </p:nvSpPr>
+        <p:spPr>
+          <a:xfrm>
+            <a:off x="2867025" y="4368800"/>
+            <a:ext cx="162560" cy="135890"/>
+          </a:xfrm>
+          <a:prstGeom prst="actionButtonForwardNext">
+            <a:avLst/>
+          </a:prstGeom>
+        </p:spPr>
+        <p:style>
+          <a:lnRef idx="2">
+            <a:schemeClr val="accent1">
+              <a:lumMod val="75000"/>
+            </a:schemeClr>
+          </a:lnRef>
+          <a:fillRef idx="1">
+            <a:schemeClr val="accent1"/>
+          </a:fillRef>
+          <a:effectRef idx="0">
+            <a:srgbClr val="FFFFFF"/>
+          </a:effectRef>
+          <a:fontRef idx="minor">
+            <a:schemeClr val="lt1"/>
+          </a:fontRef>
+        </p:style>
+        <p:txBody>
+          <a:bodyPr rtlCol="0" anchor="ctr"/>
+          <a:p>
+            <a:pPr algn="ctr"/>
+            <a:endParaRPr lang="zh-CN" altLang="en-US"/>
+          </a:p>
+        </p:txBody>
+      </p:sp>
+      <p:sp>
+        <p:nvSpPr>
+          <p:cNvPr id="132" name="动作按钮: 前进或下一项 131">
+            <a:hlinkClick r:id="" action="ppaction://hlinkshowjump?jump=nextslide"/>
+          </p:cNvPr>
+          <p:cNvSpPr/>
+          <p:nvPr/>
+        </p:nvSpPr>
+        <p:spPr>
+          <a:xfrm>
+            <a:off x="5192395" y="3557905"/>
+            <a:ext cx="162560" cy="135890"/>
+          </a:xfrm>
+          <a:prstGeom prst="actionButtonForwardNext">
+            <a:avLst/>
+          </a:prstGeom>
+        </p:spPr>
+        <p:style>
+          <a:lnRef idx="2">
+            <a:schemeClr val="accent1">
+              <a:lumMod val="75000"/>
+            </a:schemeClr>
+          </a:lnRef>
+          <a:fillRef idx="1">
+            <a:schemeClr val="accent1"/>
+          </a:fillRef>
+          <a:effectRef idx="0">
+            <a:srgbClr val="FFFFFF"/>
+          </a:effectRef>
+          <a:fontRef idx="minor">
+            <a:schemeClr val="lt1"/>
+          </a:fontRef>
+        </p:style>
+        <p:txBody>
+          <a:bodyPr rtlCol="0" anchor="ctr"/>
+          <a:p>
+            <a:pPr algn="ctr"/>
+            <a:endParaRPr lang="zh-CN" altLang="en-US"/>
+          </a:p>
+        </p:txBody>
+      </p:sp>
+      <p:sp>
+        <p:nvSpPr>
+          <p:cNvPr id="133" name="动作按钮: 前进或下一项 132">
+            <a:hlinkClick r:id="" action="ppaction://hlinkshowjump?jump=nextslide"/>
+          </p:cNvPr>
+          <p:cNvSpPr/>
+          <p:nvPr/>
+        </p:nvSpPr>
+        <p:spPr>
+          <a:xfrm>
+            <a:off x="5192395" y="3959225"/>
+            <a:ext cx="162560" cy="135890"/>
+          </a:xfrm>
+          <a:prstGeom prst="actionButtonForwardNext">
+            <a:avLst/>
+          </a:prstGeom>
+        </p:spPr>
+        <p:style>
+          <a:lnRef idx="2">
+            <a:schemeClr val="accent1">
+              <a:lumMod val="75000"/>
+            </a:schemeClr>
+          </a:lnRef>
+          <a:fillRef idx="1">
+            <a:schemeClr val="accent1"/>
+          </a:fillRef>
+          <a:effectRef idx="0">
+            <a:srgbClr val="FFFFFF"/>
+          </a:effectRef>
+          <a:fontRef idx="minor">
+            <a:schemeClr val="lt1"/>
+          </a:fontRef>
+        </p:style>
+        <p:txBody>
+          <a:bodyPr rtlCol="0" anchor="ctr"/>
+          <a:p>
+            <a:pPr algn="ctr"/>
+            <a:endParaRPr lang="zh-CN" altLang="en-US"/>
+          </a:p>
+        </p:txBody>
+      </p:sp>
+      <p:sp>
+        <p:nvSpPr>
+          <p:cNvPr id="134" name="动作按钮: 前进或下一项 133">
+            <a:hlinkClick r:id="" action="ppaction://hlinkshowjump?jump=nextslide"/>
+          </p:cNvPr>
+          <p:cNvSpPr/>
+          <p:nvPr/>
+        </p:nvSpPr>
+        <p:spPr>
+          <a:xfrm>
+            <a:off x="5192395" y="4334510"/>
+            <a:ext cx="162560" cy="135890"/>
+          </a:xfrm>
+          <a:prstGeom prst="actionButtonForwardNext">
+            <a:avLst/>
+          </a:prstGeom>
+        </p:spPr>
+        <p:style>
+          <a:lnRef idx="2">
+            <a:schemeClr val="accent1">
+              <a:lumMod val="75000"/>
+            </a:schemeClr>
+          </a:lnRef>
+          <a:fillRef idx="1">
+            <a:schemeClr val="accent1"/>
+          </a:fillRef>
+          <a:effectRef idx="0">
+            <a:srgbClr val="FFFFFF"/>
+          </a:effectRef>
+          <a:fontRef idx="minor">
+            <a:schemeClr val="lt1"/>
+          </a:fontRef>
+        </p:style>
+        <p:txBody>
+          <a:bodyPr rtlCol="0" anchor="ctr"/>
+          <a:p>
+            <a:pPr algn="ctr"/>
+            <a:endParaRPr lang="zh-CN" altLang="en-US"/>
+          </a:p>
+        </p:txBody>
+      </p:sp>
+      <p:sp>
+        <p:nvSpPr>
+          <p:cNvPr id="135" name="动作按钮: 前进或下一项 134">
+            <a:hlinkClick r:id="" action="ppaction://hlinkshowjump?jump=nextslide"/>
+          </p:cNvPr>
+          <p:cNvSpPr/>
+          <p:nvPr/>
+        </p:nvSpPr>
+        <p:spPr>
+          <a:xfrm>
+            <a:off x="7489190" y="3558540"/>
+            <a:ext cx="162560" cy="135890"/>
+          </a:xfrm>
+          <a:prstGeom prst="actionButtonForwardNext">
+            <a:avLst/>
+          </a:prstGeom>
+        </p:spPr>
+        <p:style>
+          <a:lnRef idx="2">
+            <a:schemeClr val="accent1">
+              <a:lumMod val="75000"/>
+            </a:schemeClr>
+          </a:lnRef>
+          <a:fillRef idx="1">
+            <a:schemeClr val="accent1"/>
+          </a:fillRef>
+          <a:effectRef idx="0">
+            <a:srgbClr val="FFFFFF"/>
+          </a:effectRef>
+          <a:fontRef idx="minor">
+            <a:schemeClr val="lt1"/>
+          </a:fontRef>
+        </p:style>
+        <p:txBody>
+          <a:bodyPr rtlCol="0" anchor="ctr"/>
+          <a:p>
+            <a:pPr algn="ctr"/>
+            <a:endParaRPr lang="zh-CN" altLang="en-US"/>
+          </a:p>
+        </p:txBody>
+      </p:sp>
+      <p:sp>
+        <p:nvSpPr>
+          <p:cNvPr id="136" name="动作按钮: 前进或下一项 135">
+            <a:hlinkClick r:id="" action="ppaction://hlinkshowjump?jump=nextslide"/>
+          </p:cNvPr>
+          <p:cNvSpPr/>
+          <p:nvPr/>
+        </p:nvSpPr>
+        <p:spPr>
+          <a:xfrm>
+            <a:off x="7489190" y="3959860"/>
+            <a:ext cx="162560" cy="135890"/>
+          </a:xfrm>
+          <a:prstGeom prst="actionButtonForwardNext">
+            <a:avLst/>
+          </a:prstGeom>
+        </p:spPr>
+        <p:style>
+          <a:lnRef idx="2">
+            <a:schemeClr val="accent1">
+              <a:lumMod val="75000"/>
+            </a:schemeClr>
+          </a:lnRef>
+          <a:fillRef idx="1">
+            <a:schemeClr val="accent1"/>
+          </a:fillRef>
+          <a:effectRef idx="0">
+            <a:srgbClr val="FFFFFF"/>
+          </a:effectRef>
+          <a:fontRef idx="minor">
+            <a:schemeClr val="lt1"/>
+          </a:fontRef>
+        </p:style>
+        <p:txBody>
+          <a:bodyPr rtlCol="0" anchor="ctr"/>
+          <a:p>
+            <a:pPr algn="ctr"/>
+            <a:endParaRPr lang="zh-CN" altLang="en-US"/>
+          </a:p>
+        </p:txBody>
+      </p:sp>
+      <p:sp>
+        <p:nvSpPr>
+          <p:cNvPr id="137" name="动作按钮: 前进或下一项 136">
+            <a:hlinkClick r:id="" action="ppaction://hlinkshowjump?jump=nextslide"/>
+          </p:cNvPr>
+          <p:cNvSpPr/>
+          <p:nvPr/>
+        </p:nvSpPr>
+        <p:spPr>
+          <a:xfrm>
+            <a:off x="7489190" y="4335145"/>
+            <a:ext cx="162560" cy="135890"/>
+          </a:xfrm>
+          <a:prstGeom prst="actionButtonForwardNext">
+            <a:avLst/>
+          </a:prstGeom>
+        </p:spPr>
+        <p:style>
+          <a:lnRef idx="2">
+            <a:schemeClr val="accent1">
+              <a:lumMod val="75000"/>
+            </a:schemeClr>
+          </a:lnRef>
+          <a:fillRef idx="1">
+            <a:schemeClr val="accent1"/>
+          </a:fillRef>
+          <a:effectRef idx="0">
+            <a:srgbClr val="FFFFFF"/>
+          </a:effectRef>
+          <a:fontRef idx="minor">
+            <a:schemeClr val="lt1"/>
+          </a:fontRef>
+        </p:style>
+        <p:txBody>
+          <a:bodyPr rtlCol="0" anchor="ctr"/>
+          <a:p>
+            <a:pPr algn="ctr"/>
+            <a:endParaRPr lang="zh-CN" altLang="en-US"/>
+          </a:p>
+        </p:txBody>
+      </p:sp>
+      <p:sp>
+        <p:nvSpPr>
+          <p:cNvPr id="138" name="动作按钮: 前进或下一项 137">
+            <a:hlinkClick r:id="" action="ppaction://hlinkshowjump?jump=nextslide"/>
+          </p:cNvPr>
+          <p:cNvSpPr/>
+          <p:nvPr/>
+        </p:nvSpPr>
+        <p:spPr>
+          <a:xfrm>
+            <a:off x="9885045" y="3592195"/>
+            <a:ext cx="162560" cy="135890"/>
+          </a:xfrm>
+          <a:prstGeom prst="actionButtonForwardNext">
+            <a:avLst/>
+          </a:prstGeom>
+        </p:spPr>
+        <p:style>
+          <a:lnRef idx="2">
+            <a:schemeClr val="accent1">
+              <a:lumMod val="75000"/>
+            </a:schemeClr>
+          </a:lnRef>
+          <a:fillRef idx="1">
+            <a:schemeClr val="accent1"/>
+          </a:fillRef>
+          <a:effectRef idx="0">
+            <a:srgbClr val="FFFFFF"/>
+          </a:effectRef>
+          <a:fontRef idx="minor">
+            <a:schemeClr val="lt1"/>
+          </a:fontRef>
+        </p:style>
+        <p:txBody>
+          <a:bodyPr rtlCol="0" anchor="ctr"/>
+          <a:p>
+            <a:pPr algn="ctr"/>
+            <a:endParaRPr lang="zh-CN" altLang="en-US"/>
+          </a:p>
+        </p:txBody>
+      </p:sp>
+      <p:sp>
+        <p:nvSpPr>
+          <p:cNvPr id="139" name="动作按钮: 前进或下一项 138">
+            <a:hlinkClick r:id="" action="ppaction://hlinkshowjump?jump=nextslide"/>
+          </p:cNvPr>
+          <p:cNvSpPr/>
+          <p:nvPr/>
+        </p:nvSpPr>
+        <p:spPr>
+          <a:xfrm>
+            <a:off x="9885045" y="3993515"/>
+            <a:ext cx="162560" cy="135890"/>
+          </a:xfrm>
+          <a:prstGeom prst="actionButtonForwardNext">
+            <a:avLst/>
+          </a:prstGeom>
+        </p:spPr>
+        <p:style>
+          <a:lnRef idx="2">
+            <a:schemeClr val="accent1">
+              <a:lumMod val="75000"/>
+            </a:schemeClr>
+          </a:lnRef>
+          <a:fillRef idx="1">
+            <a:schemeClr val="accent1"/>
+          </a:fillRef>
+          <a:effectRef idx="0">
+            <a:srgbClr val="FFFFFF"/>
+          </a:effectRef>
+          <a:fontRef idx="minor">
+            <a:schemeClr val="lt1"/>
+          </a:fontRef>
+        </p:style>
+        <p:txBody>
+          <a:bodyPr rtlCol="0" anchor="ctr"/>
+          <a:p>
+            <a:pPr algn="ctr"/>
+            <a:endParaRPr lang="zh-CN" altLang="en-US"/>
+          </a:p>
+        </p:txBody>
+      </p:sp>
+      <p:sp>
+        <p:nvSpPr>
+          <p:cNvPr id="140" name="动作按钮: 前进或下一项 139">
+            <a:hlinkClick r:id="" action="ppaction://hlinkshowjump?jump=nextslide"/>
+          </p:cNvPr>
+          <p:cNvSpPr/>
+          <p:nvPr/>
+        </p:nvSpPr>
+        <p:spPr>
+          <a:xfrm>
+            <a:off x="9885045" y="4368800"/>
+            <a:ext cx="162560" cy="135890"/>
+          </a:xfrm>
+          <a:prstGeom prst="actionButtonForwardNext">
+            <a:avLst/>
+          </a:prstGeom>
+        </p:spPr>
+        <p:style>
+          <a:lnRef idx="2">
+            <a:schemeClr val="accent1">
+              <a:lumMod val="75000"/>
+            </a:schemeClr>
+          </a:lnRef>
+          <a:fillRef idx="1">
+            <a:schemeClr val="accent1"/>
+          </a:fillRef>
+          <a:effectRef idx="0">
+            <a:srgbClr val="FFFFFF"/>
+          </a:effectRef>
+          <a:fontRef idx="minor">
+            <a:schemeClr val="lt1"/>
+          </a:fontRef>
+        </p:style>
+        <p:txBody>
+          <a:bodyPr rtlCol="0" anchor="ctr"/>
+          <a:p>
+            <a:pPr algn="ctr"/>
+            <a:endParaRPr lang="zh-CN" altLang="en-US"/>
+          </a:p>
+        </p:txBody>
+      </p:sp>
     </p:spTree>
     <p:custDataLst>
-      <p:tags r:id="rId1"/>
+      <p:tags r:id="rId7"/>
     </p:custDataLst>
   </p:cSld>
   <p:clrMapOvr>
@@ -2942,6 +7755,41 @@
 </file>
 
 <file path=ppt/tags/tag1.xml><?xml version="1.0" encoding="utf-8"?>
+<p:tagLst xmlns:p="http://schemas.openxmlformats.org/presentationml/2006/main">
+  <p:tag name="TABLE_ENDDRAG_ORIGIN_RECT" val="120*90"/>
+  <p:tag name="TABLE_ENDDRAG_RECT" val="63*275*120*90"/>
+</p:tagLst>
+</file>
+
+<file path=ppt/tags/tag2.xml><?xml version="1.0" encoding="utf-8"?>
+<p:tagLst xmlns:p="http://schemas.openxmlformats.org/presentationml/2006/main">
+  <p:tag name="TABLE_ENDDRAG_ORIGIN_RECT" val="120*90"/>
+  <p:tag name="TABLE_ENDDRAG_RECT" val="63*275*120*90"/>
+</p:tagLst>
+</file>
+
+<file path=ppt/tags/tag3.xml><?xml version="1.0" encoding="utf-8"?>
+<p:tagLst xmlns:p="http://schemas.openxmlformats.org/presentationml/2006/main">
+  <p:tag name="TABLE_ENDDRAG_ORIGIN_RECT" val="120*90"/>
+  <p:tag name="TABLE_ENDDRAG_RECT" val="63*275*120*90"/>
+</p:tagLst>
+</file>
+
+<file path=ppt/tags/tag4.xml><?xml version="1.0" encoding="utf-8"?>
+<p:tagLst xmlns:p="http://schemas.openxmlformats.org/presentationml/2006/main">
+  <p:tag name="TABLE_ENDDRAG_ORIGIN_RECT" val="120*90"/>
+  <p:tag name="TABLE_ENDDRAG_RECT" val="63*275*120*90"/>
+</p:tagLst>
+</file>
+
+<file path=ppt/tags/tag5.xml><?xml version="1.0" encoding="utf-8"?>
+<p:tagLst xmlns:p="http://schemas.openxmlformats.org/presentationml/2006/main">
+  <p:tag name="TABLE_ENDDRAG_ORIGIN_RECT" val="120*90"/>
+  <p:tag name="TABLE_ENDDRAG_RECT" val="63*275*120*90"/>
+</p:tagLst>
+</file>
+
+<file path=ppt/tags/tag6.xml><?xml version="1.0" encoding="utf-8"?>
 <p:tagLst xmlns:p="http://schemas.openxmlformats.org/presentationml/2006/main">
   <p:tag name="KSO_WM_NEW_CREATE" val="1"/>
 </p:tagLst>
